--- a/相关说明文档/普通AC构建.pptx
+++ b/相关说明文档/普通AC构建.pptx
@@ -6,8 +6,10 @@
   </p:sldMasterIdLst>
   <p:sldIdLst>
     <p:sldId id="258" r:id="rId2"/>
-    <p:sldId id="259" r:id="rId3"/>
-    <p:sldId id="260" r:id="rId4"/>
+    <p:sldId id="262" r:id="rId3"/>
+    <p:sldId id="259" r:id="rId4"/>
+    <p:sldId id="260" r:id="rId5"/>
+    <p:sldId id="261" r:id="rId6"/>
   </p:sldIdLst>
   <p:sldSz cx="12192000" cy="6858000"/>
   <p:notesSz cx="6858000" cy="9144000"/>
@@ -107,6 +109,27 @@
     </a:lvl9pPr>
   </p:defaultTextStyle>
   <p:extLst>
+    <p:ext uri="{521415D9-36F7-43E2-AB2F-B90AF26B5E84}">
+      <p14:sectionLst xmlns:p14="http://schemas.microsoft.com/office/powerpoint/2010/main">
+        <p14:section name="默认节" id="{BF7BE91A-4AF7-4F4F-ACCB-A16E8F81AE8D}">
+          <p14:sldIdLst>
+            <p14:sldId id="258"/>
+            <p14:sldId id="262"/>
+          </p14:sldIdLst>
+        </p14:section>
+        <p14:section name="不理解的地方" id="{EAB8D0E1-3411-4B0C-A0DC-D74AC59AC647}">
+          <p14:sldIdLst>
+            <p14:sldId id="259"/>
+          </p14:sldIdLst>
+        </p14:section>
+        <p14:section name="构建实际控制律" id="{88419DF4-7DDA-4EA2-9340-E9C9CB3E20F5}">
+          <p14:sldIdLst>
+            <p14:sldId id="260"/>
+            <p14:sldId id="261"/>
+          </p14:sldIdLst>
+        </p14:section>
+      </p14:sectionLst>
+    </p:ext>
     <p:ext uri="{EFAFB233-063F-42B5-8137-9DF3F51BA10A}">
       <p15:sldGuideLst xmlns:p15="http://schemas.microsoft.com/office/powerpoint/2012/main"/>
     </p:ext>
@@ -261,7 +284,7 @@
           <a:p>
             <a:fld id="{EF4FF0CC-3570-4ECA-B82E-A087111D5163}" type="datetimeFigureOut">
               <a:rPr lang="zh-CN" altLang="en-US" smtClean="0"/>
-              <a:t>2026/10/12</a:t>
+              <a:t>2026/10/14</a:t>
             </a:fld>
             <a:endParaRPr lang="zh-CN" altLang="en-US"/>
           </a:p>
@@ -459,7 +482,7 @@
           <a:p>
             <a:fld id="{EF4FF0CC-3570-4ECA-B82E-A087111D5163}" type="datetimeFigureOut">
               <a:rPr lang="zh-CN" altLang="en-US" smtClean="0"/>
-              <a:t>2026/10/12</a:t>
+              <a:t>2026/10/14</a:t>
             </a:fld>
             <a:endParaRPr lang="zh-CN" altLang="en-US"/>
           </a:p>
@@ -667,7 +690,7 @@
           <a:p>
             <a:fld id="{EF4FF0CC-3570-4ECA-B82E-A087111D5163}" type="datetimeFigureOut">
               <a:rPr lang="zh-CN" altLang="en-US" smtClean="0"/>
-              <a:t>2026/10/12</a:t>
+              <a:t>2026/10/14</a:t>
             </a:fld>
             <a:endParaRPr lang="zh-CN" altLang="en-US"/>
           </a:p>
@@ -865,7 +888,7 @@
           <a:p>
             <a:fld id="{EF4FF0CC-3570-4ECA-B82E-A087111D5163}" type="datetimeFigureOut">
               <a:rPr lang="zh-CN" altLang="en-US" smtClean="0"/>
-              <a:t>2026/10/12</a:t>
+              <a:t>2026/10/14</a:t>
             </a:fld>
             <a:endParaRPr lang="zh-CN" altLang="en-US"/>
           </a:p>
@@ -1140,7 +1163,7 @@
           <a:p>
             <a:fld id="{EF4FF0CC-3570-4ECA-B82E-A087111D5163}" type="datetimeFigureOut">
               <a:rPr lang="zh-CN" altLang="en-US" smtClean="0"/>
-              <a:t>2026/10/12</a:t>
+              <a:t>2026/10/14</a:t>
             </a:fld>
             <a:endParaRPr lang="zh-CN" altLang="en-US"/>
           </a:p>
@@ -1405,7 +1428,7 @@
           <a:p>
             <a:fld id="{EF4FF0CC-3570-4ECA-B82E-A087111D5163}" type="datetimeFigureOut">
               <a:rPr lang="zh-CN" altLang="en-US" smtClean="0"/>
-              <a:t>2026/10/12</a:t>
+              <a:t>2026/10/14</a:t>
             </a:fld>
             <a:endParaRPr lang="zh-CN" altLang="en-US"/>
           </a:p>
@@ -1817,7 +1840,7 @@
           <a:p>
             <a:fld id="{EF4FF0CC-3570-4ECA-B82E-A087111D5163}" type="datetimeFigureOut">
               <a:rPr lang="zh-CN" altLang="en-US" smtClean="0"/>
-              <a:t>2026/10/12</a:t>
+              <a:t>2026/10/14</a:t>
             </a:fld>
             <a:endParaRPr lang="zh-CN" altLang="en-US"/>
           </a:p>
@@ -1958,7 +1981,7 @@
           <a:p>
             <a:fld id="{EF4FF0CC-3570-4ECA-B82E-A087111D5163}" type="datetimeFigureOut">
               <a:rPr lang="zh-CN" altLang="en-US" smtClean="0"/>
-              <a:t>2026/10/12</a:t>
+              <a:t>2026/10/14</a:t>
             </a:fld>
             <a:endParaRPr lang="zh-CN" altLang="en-US"/>
           </a:p>
@@ -2071,7 +2094,7 @@
           <a:p>
             <a:fld id="{EF4FF0CC-3570-4ECA-B82E-A087111D5163}" type="datetimeFigureOut">
               <a:rPr lang="zh-CN" altLang="en-US" smtClean="0"/>
-              <a:t>2026/10/12</a:t>
+              <a:t>2026/10/14</a:t>
             </a:fld>
             <a:endParaRPr lang="zh-CN" altLang="en-US"/>
           </a:p>
@@ -2382,7 +2405,7 @@
           <a:p>
             <a:fld id="{EF4FF0CC-3570-4ECA-B82E-A087111D5163}" type="datetimeFigureOut">
               <a:rPr lang="zh-CN" altLang="en-US" smtClean="0"/>
-              <a:t>2026/10/12</a:t>
+              <a:t>2026/10/14</a:t>
             </a:fld>
             <a:endParaRPr lang="zh-CN" altLang="en-US"/>
           </a:p>
@@ -2670,7 +2693,7 @@
           <a:p>
             <a:fld id="{EF4FF0CC-3570-4ECA-B82E-A087111D5163}" type="datetimeFigureOut">
               <a:rPr lang="zh-CN" altLang="en-US" smtClean="0"/>
-              <a:t>2026/10/12</a:t>
+              <a:t>2026/10/14</a:t>
             </a:fld>
             <a:endParaRPr lang="zh-CN" altLang="en-US"/>
           </a:p>
@@ -2911,7 +2934,7 @@
           <a:p>
             <a:fld id="{EF4FF0CC-3570-4ECA-B82E-A087111D5163}" type="datetimeFigureOut">
               <a:rPr lang="zh-CN" altLang="en-US" smtClean="0"/>
-              <a:t>2026/10/12</a:t>
+              <a:t>2026/10/14</a:t>
             </a:fld>
             <a:endParaRPr lang="zh-CN" altLang="en-US"/>
           </a:p>
@@ -3378,7 +3401,7 @@
         </p:nvSpPr>
         <p:spPr>
           <a:xfrm>
-            <a:off x="72365" y="789410"/>
+            <a:off x="72365" y="509608"/>
             <a:ext cx="5861367" cy="646331"/>
           </a:xfrm>
           <a:prstGeom prst="rect">
@@ -3413,10 +3436,10 @@
       </p:sp>
       <p:pic>
         <p:nvPicPr>
-          <p:cNvPr id="9" name="图片 8">
-            <a:extLst>
-              <a:ext uri="{FF2B5EF4-FFF2-40B4-BE49-F238E27FC236}">
-                <a16:creationId xmlns:a16="http://schemas.microsoft.com/office/drawing/2014/main" id="{38A2454C-775B-DF5C-84A6-FD4D8E9637B0}"/>
+          <p:cNvPr id="10" name="图片 9">
+            <a:extLst>
+              <a:ext uri="{FF2B5EF4-FFF2-40B4-BE49-F238E27FC236}">
+                <a16:creationId xmlns:a16="http://schemas.microsoft.com/office/drawing/2014/main" id="{5C482FF8-E5E7-D00C-9DFC-C5931D02FD6B}"/>
               </a:ext>
             </a:extLst>
           </p:cNvPr>
@@ -3433,8 +3456,8 @@
         </p:blipFill>
         <p:spPr>
           <a:xfrm>
-            <a:off x="2042975" y="148700"/>
-            <a:ext cx="1514475" cy="495300"/>
+            <a:off x="502153" y="1270354"/>
+            <a:ext cx="1848259" cy="1507211"/>
           </a:xfrm>
           <a:prstGeom prst="rect">
             <a:avLst/>
@@ -3443,10 +3466,10 @@
       </p:pic>
       <p:pic>
         <p:nvPicPr>
-          <p:cNvPr id="10" name="图片 9">
-            <a:extLst>
-              <a:ext uri="{FF2B5EF4-FFF2-40B4-BE49-F238E27FC236}">
-                <a16:creationId xmlns:a16="http://schemas.microsoft.com/office/drawing/2014/main" id="{5C482FF8-E5E7-D00C-9DFC-C5931D02FD6B}"/>
+          <p:cNvPr id="11" name="图片 10">
+            <a:extLst>
+              <a:ext uri="{FF2B5EF4-FFF2-40B4-BE49-F238E27FC236}">
+                <a16:creationId xmlns:a16="http://schemas.microsoft.com/office/drawing/2014/main" id="{F67C978C-B0F7-9F5E-2DEC-762AD782F0FA}"/>
               </a:ext>
             </a:extLst>
           </p:cNvPr>
@@ -3463,20 +3486,105 @@
         </p:blipFill>
         <p:spPr>
           <a:xfrm>
-            <a:off x="1876082" y="1337065"/>
-            <a:ext cx="1848259" cy="1507211"/>
+            <a:off x="134053" y="3323275"/>
+            <a:ext cx="2867025" cy="3448050"/>
           </a:xfrm>
           <a:prstGeom prst="rect">
             <a:avLst/>
           </a:prstGeom>
         </p:spPr>
       </p:pic>
+      <p:sp>
+        <p:nvSpPr>
+          <p:cNvPr id="12" name="文本框 11">
+            <a:extLst>
+              <a:ext uri="{FF2B5EF4-FFF2-40B4-BE49-F238E27FC236}">
+                <a16:creationId xmlns:a16="http://schemas.microsoft.com/office/drawing/2014/main" id="{485D148F-8D22-B4EE-B67C-3F7815165E41}"/>
+              </a:ext>
+            </a:extLst>
+          </p:cNvPr>
+          <p:cNvSpPr txBox="1"/>
+          <p:nvPr/>
+        </p:nvSpPr>
+        <p:spPr>
+          <a:xfrm>
+            <a:off x="3080901" y="4172646"/>
+            <a:ext cx="2823442" cy="2585323"/>
+          </a:xfrm>
+          <a:prstGeom prst="rect">
+            <a:avLst/>
+          </a:prstGeom>
+          <a:noFill/>
+        </p:spPr>
+        <p:txBody>
+          <a:bodyPr wrap="square" rtlCol="0">
+            <a:spAutoFit/>
+          </a:bodyPr>
+          <a:lstStyle/>
+          <a:p>
+            <a:r>
+              <a:rPr lang="zh-CN" altLang="en-US" dirty="0"/>
+              <a:t>其中，</a:t>
+            </a:r>
+            <a:r>
+              <a:rPr lang="en-US" altLang="zh-CN" dirty="0"/>
+              <a:t>lambda</a:t>
+            </a:r>
+            <a:r>
+              <a:rPr lang="zh-CN" altLang="en-US" dirty="0"/>
+              <a:t>是人为设计的正定增益矩阵</a:t>
+            </a:r>
+            <a:endParaRPr lang="en-US" altLang="zh-CN" dirty="0"/>
+          </a:p>
+          <a:p>
+            <a:r>
+              <a:rPr lang="en-US" altLang="zh-CN" dirty="0"/>
+              <a:t>Lambda</a:t>
+            </a:r>
+            <a:r>
+              <a:rPr lang="zh-CN" altLang="en-US" dirty="0"/>
+              <a:t>即误差经过增益矩阵加权后的修正项</a:t>
+            </a:r>
+            <a:endParaRPr lang="en-US" altLang="zh-CN" dirty="0"/>
+          </a:p>
+          <a:p>
+            <a:endParaRPr lang="en-US" altLang="zh-CN" dirty="0"/>
+          </a:p>
+          <a:p>
+            <a:r>
+              <a:rPr lang="zh-CN" altLang="en-US" dirty="0"/>
+              <a:t>为什么要减去</a:t>
+            </a:r>
+            <a:r>
+              <a:rPr lang="en-US" altLang="zh-CN" dirty="0" err="1"/>
+              <a:t>lambdae</a:t>
+            </a:r>
+            <a:r>
+              <a:rPr lang="zh-CN" altLang="en-US" dirty="0"/>
+              <a:t>：核心目的是为了让位置误差能够收敛到</a:t>
+            </a:r>
+            <a:r>
+              <a:rPr lang="en-US" altLang="zh-CN" dirty="0"/>
+              <a:t>0</a:t>
+            </a:r>
+            <a:r>
+              <a:rPr lang="zh-CN" altLang="en-US" dirty="0"/>
+              <a:t>，而不仅仅让速度误差收敛到</a:t>
+            </a:r>
+            <a:r>
+              <a:rPr lang="en-US" altLang="zh-CN" dirty="0"/>
+              <a:t>0</a:t>
+            </a:r>
+            <a:endParaRPr lang="zh-CN" altLang="en-US" dirty="0"/>
+          </a:p>
+        </p:txBody>
+      </p:sp>
       <p:pic>
         <p:nvPicPr>
-          <p:cNvPr id="11" name="图片 10">
-            <a:extLst>
-              <a:ext uri="{FF2B5EF4-FFF2-40B4-BE49-F238E27FC236}">
-                <a16:creationId xmlns:a16="http://schemas.microsoft.com/office/drawing/2014/main" id="{F67C978C-B0F7-9F5E-2DEC-762AD782F0FA}"/>
+          <p:cNvPr id="6" name="图片 5">
+            <a:extLst>
+              <a:ext uri="{FF2B5EF4-FFF2-40B4-BE49-F238E27FC236}">
+                <a16:creationId xmlns:a16="http://schemas.microsoft.com/office/drawing/2014/main" id="{5CFAA31F-E3AD-8B7A-973E-E85530EC8FFE}"/>
               </a:ext>
             </a:extLst>
           </p:cNvPr>
@@ -3486,151 +3594,33 @@
           <p:nvPr/>
         </p:nvPicPr>
         <p:blipFill>
-          <a:blip r:embed="rId4"/>
+          <a:blip r:embed="rId4">
+            <a:extLst>
+              <a:ext uri="{28A0092B-C50C-407E-A947-70E740481C1C}">
+                <a14:useLocalDpi xmlns:a14="http://schemas.microsoft.com/office/drawing/2010/main" val="0"/>
+              </a:ext>
+            </a:extLst>
+          </a:blip>
           <a:stretch>
             <a:fillRect/>
           </a:stretch>
         </p:blipFill>
         <p:spPr>
           <a:xfrm>
-            <a:off x="195741" y="3158806"/>
-            <a:ext cx="2867025" cy="3448050"/>
+            <a:off x="1858435" y="86675"/>
+            <a:ext cx="1883554" cy="328999"/>
           </a:xfrm>
           <a:prstGeom prst="rect">
             <a:avLst/>
           </a:prstGeom>
         </p:spPr>
       </p:pic>
-      <p:sp>
-        <p:nvSpPr>
-          <p:cNvPr id="12" name="文本框 11">
-            <a:extLst>
-              <a:ext uri="{FF2B5EF4-FFF2-40B4-BE49-F238E27FC236}">
-                <a16:creationId xmlns:a16="http://schemas.microsoft.com/office/drawing/2014/main" id="{485D148F-8D22-B4EE-B67C-3F7815165E41}"/>
-              </a:ext>
-            </a:extLst>
-          </p:cNvPr>
-          <p:cNvSpPr txBox="1"/>
-          <p:nvPr/>
-        </p:nvSpPr>
-        <p:spPr>
-          <a:xfrm>
-            <a:off x="3110290" y="3177374"/>
-            <a:ext cx="2823442" cy="2585323"/>
-          </a:xfrm>
-          <a:prstGeom prst="rect">
-            <a:avLst/>
-          </a:prstGeom>
-          <a:noFill/>
-        </p:spPr>
-        <p:txBody>
-          <a:bodyPr wrap="square" rtlCol="0">
-            <a:spAutoFit/>
-          </a:bodyPr>
-          <a:lstStyle/>
-          <a:p>
-            <a:r>
-              <a:rPr lang="zh-CN" altLang="en-US" dirty="0"/>
-              <a:t>其中，</a:t>
-            </a:r>
-            <a:r>
-              <a:rPr lang="en-US" altLang="zh-CN" dirty="0"/>
-              <a:t>lambda</a:t>
-            </a:r>
-            <a:r>
-              <a:rPr lang="zh-CN" altLang="en-US" dirty="0"/>
-              <a:t>是人为设计的正定增益矩阵</a:t>
-            </a:r>
-            <a:endParaRPr lang="en-US" altLang="zh-CN" dirty="0"/>
-          </a:p>
-          <a:p>
-            <a:r>
-              <a:rPr lang="en-US" altLang="zh-CN" dirty="0"/>
-              <a:t>Lambda</a:t>
-            </a:r>
-            <a:r>
-              <a:rPr lang="zh-CN" altLang="en-US" dirty="0"/>
-              <a:t>即误差经过增益矩阵加权后的修正项</a:t>
-            </a:r>
-            <a:endParaRPr lang="en-US" altLang="zh-CN" dirty="0"/>
-          </a:p>
-          <a:p>
-            <a:endParaRPr lang="en-US" altLang="zh-CN" dirty="0"/>
-          </a:p>
-          <a:p>
-            <a:r>
-              <a:rPr lang="zh-CN" altLang="en-US" dirty="0"/>
-              <a:t>为什么要减去</a:t>
-            </a:r>
-            <a:r>
-              <a:rPr lang="en-US" altLang="zh-CN" dirty="0" err="1"/>
-              <a:t>lambdae</a:t>
-            </a:r>
-            <a:r>
-              <a:rPr lang="zh-CN" altLang="en-US" dirty="0"/>
-              <a:t>：核心目的是为了让位置误差能够收敛到</a:t>
-            </a:r>
-            <a:r>
-              <a:rPr lang="en-US" altLang="zh-CN" dirty="0"/>
-              <a:t>0</a:t>
-            </a:r>
-            <a:r>
-              <a:rPr lang="zh-CN" altLang="en-US" dirty="0"/>
-              <a:t>，而不仅仅让速度误差收敛到</a:t>
-            </a:r>
-            <a:r>
-              <a:rPr lang="en-US" altLang="zh-CN" dirty="0"/>
-              <a:t>0</a:t>
-            </a:r>
-            <a:endParaRPr lang="zh-CN" altLang="en-US" dirty="0"/>
-          </a:p>
-        </p:txBody>
-      </p:sp>
-      <p:sp>
-        <p:nvSpPr>
-          <p:cNvPr id="13" name="文本框 12">
-            <a:extLst>
-              <a:ext uri="{FF2B5EF4-FFF2-40B4-BE49-F238E27FC236}">
-                <a16:creationId xmlns:a16="http://schemas.microsoft.com/office/drawing/2014/main" id="{E0463466-6769-3E7F-9342-51FC451D3A37}"/>
-              </a:ext>
-            </a:extLst>
-          </p:cNvPr>
-          <p:cNvSpPr txBox="1"/>
-          <p:nvPr/>
-        </p:nvSpPr>
-        <p:spPr>
-          <a:xfrm>
-            <a:off x="6096000" y="44403"/>
-            <a:ext cx="2823442" cy="646331"/>
-          </a:xfrm>
-          <a:prstGeom prst="rect">
-            <a:avLst/>
-          </a:prstGeom>
-          <a:noFill/>
-        </p:spPr>
-        <p:txBody>
-          <a:bodyPr wrap="square" rtlCol="0">
-            <a:spAutoFit/>
-          </a:bodyPr>
-          <a:lstStyle/>
-          <a:p>
-            <a:r>
-              <a:rPr lang="zh-CN" altLang="en-US" dirty="0"/>
-              <a:t>为什么不使用期望速度：</a:t>
-            </a:r>
-            <a:endParaRPr lang="en-US" altLang="zh-CN" dirty="0"/>
-          </a:p>
-          <a:p>
-            <a:endParaRPr lang="zh-CN" altLang="en-US" dirty="0"/>
-          </a:p>
-        </p:txBody>
-      </p:sp>
       <p:pic>
         <p:nvPicPr>
-          <p:cNvPr id="14" name="图片 13">
-            <a:extLst>
-              <a:ext uri="{FF2B5EF4-FFF2-40B4-BE49-F238E27FC236}">
-                <a16:creationId xmlns:a16="http://schemas.microsoft.com/office/drawing/2014/main" id="{3F24AE09-C787-9191-85F4-68CE43E0DA58}"/>
+          <p:cNvPr id="17" name="图片 16">
+            <a:extLst>
+              <a:ext uri="{FF2B5EF4-FFF2-40B4-BE49-F238E27FC236}">
+                <a16:creationId xmlns:a16="http://schemas.microsoft.com/office/drawing/2014/main" id="{56AA67B6-52F2-74FB-C6DA-0BDF512B2CAE}"/>
               </a:ext>
             </a:extLst>
           </p:cNvPr>
@@ -3640,21 +3630,722 @@
           <p:nvPr/>
         </p:nvPicPr>
         <p:blipFill>
-          <a:blip r:embed="rId5"/>
+          <a:blip r:embed="rId5">
+            <a:extLst>
+              <a:ext uri="{28A0092B-C50C-407E-A947-70E740481C1C}">
+                <a14:useLocalDpi xmlns:a14="http://schemas.microsoft.com/office/drawing/2010/main" val="0"/>
+              </a:ext>
+            </a:extLst>
+          </a:blip>
           <a:stretch>
             <a:fillRect/>
           </a:stretch>
         </p:blipFill>
         <p:spPr>
           <a:xfrm>
-            <a:off x="6547783" y="554423"/>
-            <a:ext cx="4874779" cy="5749153"/>
+            <a:off x="2523992" y="1392692"/>
+            <a:ext cx="3439130" cy="283186"/>
           </a:xfrm>
           <a:prstGeom prst="rect">
             <a:avLst/>
           </a:prstGeom>
         </p:spPr>
       </p:pic>
+      <p:pic>
+        <p:nvPicPr>
+          <p:cNvPr id="20" name="图片 19">
+            <a:extLst>
+              <a:ext uri="{FF2B5EF4-FFF2-40B4-BE49-F238E27FC236}">
+                <a16:creationId xmlns:a16="http://schemas.microsoft.com/office/drawing/2014/main" id="{3F92F045-DE81-C3B0-AF16-0476A341B3B4}"/>
+              </a:ext>
+            </a:extLst>
+          </p:cNvPr>
+          <p:cNvPicPr>
+            <a:picLocks noChangeAspect="1"/>
+          </p:cNvPicPr>
+          <p:nvPr/>
+        </p:nvPicPr>
+        <p:blipFill>
+          <a:blip r:embed="rId6">
+            <a:extLst>
+              <a:ext uri="{28A0092B-C50C-407E-A947-70E740481C1C}">
+                <a14:useLocalDpi xmlns:a14="http://schemas.microsoft.com/office/drawing/2010/main" val="0"/>
+              </a:ext>
+            </a:extLst>
+          </a:blip>
+          <a:stretch>
+            <a:fillRect/>
+          </a:stretch>
+        </p:blipFill>
+        <p:spPr>
+          <a:xfrm>
+            <a:off x="3594486" y="2023959"/>
+            <a:ext cx="1298142" cy="312485"/>
+          </a:xfrm>
+          <a:prstGeom prst="rect">
+            <a:avLst/>
+          </a:prstGeom>
+        </p:spPr>
+      </p:pic>
+      <p:cxnSp>
+        <p:nvCxnSpPr>
+          <p:cNvPr id="22" name="直接连接符 21">
+            <a:extLst>
+              <a:ext uri="{FF2B5EF4-FFF2-40B4-BE49-F238E27FC236}">
+                <a16:creationId xmlns:a16="http://schemas.microsoft.com/office/drawing/2014/main" id="{83F81231-8D64-00A5-C4EB-6939F645EBBB}"/>
+              </a:ext>
+            </a:extLst>
+          </p:cNvPr>
+          <p:cNvCxnSpPr>
+            <a:cxnSpLocks/>
+          </p:cNvCxnSpPr>
+          <p:nvPr/>
+        </p:nvCxnSpPr>
+        <p:spPr>
+          <a:xfrm>
+            <a:off x="0" y="2973445"/>
+            <a:ext cx="3203689" cy="0"/>
+          </a:xfrm>
+          <a:prstGeom prst="line">
+            <a:avLst/>
+          </a:prstGeom>
+        </p:spPr>
+        <p:style>
+          <a:lnRef idx="2">
+            <a:schemeClr val="accent1"/>
+          </a:lnRef>
+          <a:fillRef idx="0">
+            <a:schemeClr val="accent1"/>
+          </a:fillRef>
+          <a:effectRef idx="1">
+            <a:schemeClr val="accent1"/>
+          </a:effectRef>
+          <a:fontRef idx="minor">
+            <a:schemeClr val="tx1"/>
+          </a:fontRef>
+        </p:style>
+      </p:cxnSp>
+      <p:sp>
+        <p:nvSpPr>
+          <p:cNvPr id="23" name="文本框 22">
+            <a:extLst>
+              <a:ext uri="{FF2B5EF4-FFF2-40B4-BE49-F238E27FC236}">
+                <a16:creationId xmlns:a16="http://schemas.microsoft.com/office/drawing/2014/main" id="{67AA7E05-6D26-DC1E-894D-0743FE9039A6}"/>
+              </a:ext>
+            </a:extLst>
+          </p:cNvPr>
+          <p:cNvSpPr txBox="1"/>
+          <p:nvPr/>
+        </p:nvSpPr>
+        <p:spPr>
+          <a:xfrm>
+            <a:off x="2350414" y="2354532"/>
+            <a:ext cx="3612707" cy="646331"/>
+          </a:xfrm>
+          <a:prstGeom prst="rect">
+            <a:avLst/>
+          </a:prstGeom>
+          <a:noFill/>
+        </p:spPr>
+        <p:txBody>
+          <a:bodyPr wrap="square" rtlCol="0">
+            <a:spAutoFit/>
+          </a:bodyPr>
+          <a:lstStyle/>
+          <a:p>
+            <a:r>
+              <a:rPr lang="zh-CN" altLang="en-US" dirty="0"/>
+              <a:t>因此自适应控制器需要的主要数据是</a:t>
+            </a:r>
+            <a:r>
+              <a:rPr lang="en-US" altLang="zh-CN" dirty="0">
+                <a:solidFill>
+                  <a:srgbClr val="FF0000"/>
+                </a:solidFill>
+              </a:rPr>
+              <a:t>Ya</a:t>
+            </a:r>
+            <a:r>
+              <a:rPr lang="zh-CN" altLang="en-US" dirty="0">
+                <a:solidFill>
+                  <a:srgbClr val="FF0000"/>
+                </a:solidFill>
+              </a:rPr>
+              <a:t>矩阵</a:t>
+            </a:r>
+          </a:p>
+        </p:txBody>
+      </p:sp>
+      <p:cxnSp>
+        <p:nvCxnSpPr>
+          <p:cNvPr id="26" name="直接连接符 25">
+            <a:extLst>
+              <a:ext uri="{FF2B5EF4-FFF2-40B4-BE49-F238E27FC236}">
+                <a16:creationId xmlns:a16="http://schemas.microsoft.com/office/drawing/2014/main" id="{CBCAF98C-25D0-E4A9-5D9F-9BE24A399C09}"/>
+              </a:ext>
+            </a:extLst>
+          </p:cNvPr>
+          <p:cNvCxnSpPr/>
+          <p:nvPr/>
+        </p:nvCxnSpPr>
+        <p:spPr>
+          <a:xfrm>
+            <a:off x="3203689" y="2973445"/>
+            <a:ext cx="0" cy="1199201"/>
+          </a:xfrm>
+          <a:prstGeom prst="line">
+            <a:avLst/>
+          </a:prstGeom>
+        </p:spPr>
+        <p:style>
+          <a:lnRef idx="2">
+            <a:schemeClr val="accent1"/>
+          </a:lnRef>
+          <a:fillRef idx="0">
+            <a:schemeClr val="accent1"/>
+          </a:fillRef>
+          <a:effectRef idx="1">
+            <a:schemeClr val="accent1"/>
+          </a:effectRef>
+          <a:fontRef idx="minor">
+            <a:schemeClr val="tx1"/>
+          </a:fontRef>
+        </p:style>
+      </p:cxnSp>
+      <p:cxnSp>
+        <p:nvCxnSpPr>
+          <p:cNvPr id="28" name="直接连接符 27">
+            <a:extLst>
+              <a:ext uri="{FF2B5EF4-FFF2-40B4-BE49-F238E27FC236}">
+                <a16:creationId xmlns:a16="http://schemas.microsoft.com/office/drawing/2014/main" id="{341FBA42-353D-5774-7B63-D51AB1C49FB2}"/>
+              </a:ext>
+            </a:extLst>
+          </p:cNvPr>
+          <p:cNvCxnSpPr/>
+          <p:nvPr/>
+        </p:nvCxnSpPr>
+        <p:spPr>
+          <a:xfrm>
+            <a:off x="3203689" y="4172646"/>
+            <a:ext cx="2730043" cy="0"/>
+          </a:xfrm>
+          <a:prstGeom prst="line">
+            <a:avLst/>
+          </a:prstGeom>
+        </p:spPr>
+        <p:style>
+          <a:lnRef idx="2">
+            <a:schemeClr val="accent1"/>
+          </a:lnRef>
+          <a:fillRef idx="0">
+            <a:schemeClr val="accent1"/>
+          </a:fillRef>
+          <a:effectRef idx="1">
+            <a:schemeClr val="accent1"/>
+          </a:effectRef>
+          <a:fontRef idx="minor">
+            <a:schemeClr val="tx1"/>
+          </a:fontRef>
+        </p:style>
+      </p:cxnSp>
+      <p:sp>
+        <p:nvSpPr>
+          <p:cNvPr id="29" name="文本框 28">
+            <a:extLst>
+              <a:ext uri="{FF2B5EF4-FFF2-40B4-BE49-F238E27FC236}">
+                <a16:creationId xmlns:a16="http://schemas.microsoft.com/office/drawing/2014/main" id="{08406E40-82A8-6743-2A21-6BCE8EAF8098}"/>
+              </a:ext>
+            </a:extLst>
+          </p:cNvPr>
+          <p:cNvSpPr txBox="1"/>
+          <p:nvPr/>
+        </p:nvSpPr>
+        <p:spPr>
+          <a:xfrm>
+            <a:off x="3249738" y="3000863"/>
+            <a:ext cx="2654602" cy="1077218"/>
+          </a:xfrm>
+          <a:prstGeom prst="rect">
+            <a:avLst/>
+          </a:prstGeom>
+          <a:noFill/>
+        </p:spPr>
+        <p:txBody>
+          <a:bodyPr wrap="square" rtlCol="0">
+            <a:spAutoFit/>
+          </a:bodyPr>
+          <a:lstStyle/>
+          <a:p>
+            <a:r>
+              <a:rPr lang="zh-CN" altLang="en-US" sz="1600" dirty="0"/>
+              <a:t>因为</a:t>
+            </a:r>
+            <a:r>
+              <a:rPr lang="en-US" altLang="zh-CN" sz="1600" dirty="0"/>
+              <a:t>Y</a:t>
+            </a:r>
+            <a:r>
+              <a:rPr lang="zh-CN" altLang="en-US" sz="1600" dirty="0"/>
+              <a:t>和</a:t>
+            </a:r>
+            <a:r>
+              <a:rPr lang="en-US" altLang="zh-CN" sz="1600" dirty="0"/>
+              <a:t>Ya</a:t>
+            </a:r>
+            <a:r>
+              <a:rPr lang="zh-CN" altLang="en-US" sz="1600" dirty="0"/>
+              <a:t>描述的是同一个机器人，只是代入的运动变量不同，因此</a:t>
+            </a:r>
+            <a:r>
+              <a:rPr lang="en-US" altLang="zh-CN" sz="1600" dirty="0">
+                <a:solidFill>
+                  <a:srgbClr val="FF0000"/>
+                </a:solidFill>
+              </a:rPr>
+              <a:t>pi</a:t>
+            </a:r>
+            <a:r>
+              <a:rPr lang="zh-CN" altLang="en-US" sz="1600" dirty="0">
+                <a:solidFill>
+                  <a:srgbClr val="FF0000"/>
+                </a:solidFill>
+              </a:rPr>
+              <a:t>是同一个</a:t>
+            </a:r>
+            <a:r>
+              <a:rPr lang="en-US" altLang="zh-CN" sz="1600" dirty="0">
+                <a:solidFill>
+                  <a:srgbClr val="FF0000"/>
+                </a:solidFill>
+              </a:rPr>
+              <a:t>pi</a:t>
+            </a:r>
+            <a:r>
+              <a:rPr lang="zh-CN" altLang="en-US" sz="1600" dirty="0"/>
+              <a:t>，即机器人的质心等数据不变</a:t>
+            </a:r>
+          </a:p>
+        </p:txBody>
+      </p:sp>
+      <p:sp>
+        <p:nvSpPr>
+          <p:cNvPr id="30" name="文本框 29">
+            <a:extLst>
+              <a:ext uri="{FF2B5EF4-FFF2-40B4-BE49-F238E27FC236}">
+                <a16:creationId xmlns:a16="http://schemas.microsoft.com/office/drawing/2014/main" id="{63A42321-81FD-DD51-A888-EE802EEF0575}"/>
+              </a:ext>
+            </a:extLst>
+          </p:cNvPr>
+          <p:cNvSpPr txBox="1"/>
+          <p:nvPr/>
+        </p:nvSpPr>
+        <p:spPr>
+          <a:xfrm>
+            <a:off x="5933732" y="0"/>
+            <a:ext cx="3848374" cy="369332"/>
+          </a:xfrm>
+          <a:prstGeom prst="rect">
+            <a:avLst/>
+          </a:prstGeom>
+          <a:noFill/>
+        </p:spPr>
+        <p:txBody>
+          <a:bodyPr wrap="square" rtlCol="0">
+            <a:spAutoFit/>
+          </a:bodyPr>
+          <a:lstStyle/>
+          <a:p>
+            <a:r>
+              <a:rPr lang="en-US" altLang="zh-CN" dirty="0"/>
+              <a:t>Ya</a:t>
+            </a:r>
+            <a:r>
+              <a:rPr lang="zh-CN" altLang="en-US" dirty="0"/>
+              <a:t>如何计算：</a:t>
+            </a:r>
+            <a:endParaRPr lang="en-US" altLang="zh-CN" dirty="0"/>
+          </a:p>
+        </p:txBody>
+      </p:sp>
+      <p:sp>
+        <p:nvSpPr>
+          <p:cNvPr id="31" name="文本框 30">
+            <a:extLst>
+              <a:ext uri="{FF2B5EF4-FFF2-40B4-BE49-F238E27FC236}">
+                <a16:creationId xmlns:a16="http://schemas.microsoft.com/office/drawing/2014/main" id="{FAF44F90-DEF4-DF7D-4CA4-5CD3A973A008}"/>
+              </a:ext>
+            </a:extLst>
+          </p:cNvPr>
+          <p:cNvSpPr txBox="1"/>
+          <p:nvPr/>
+        </p:nvSpPr>
+        <p:spPr>
+          <a:xfrm>
+            <a:off x="5963121" y="363591"/>
+            <a:ext cx="6228877" cy="1754326"/>
+          </a:xfrm>
+          <a:prstGeom prst="rect">
+            <a:avLst/>
+          </a:prstGeom>
+          <a:noFill/>
+        </p:spPr>
+        <p:txBody>
+          <a:bodyPr wrap="square" rtlCol="0">
+            <a:spAutoFit/>
+          </a:bodyPr>
+          <a:lstStyle/>
+          <a:p>
+            <a:r>
+              <a:rPr lang="zh-CN" altLang="en-US" dirty="0"/>
+              <a:t>因为已经构建了参考动力学，但是</a:t>
+            </a:r>
+            <a:r>
+              <a:rPr lang="en-US" altLang="zh-CN" dirty="0"/>
+              <a:t>M</a:t>
+            </a:r>
+            <a:r>
+              <a:rPr lang="zh-CN" altLang="en-US" dirty="0"/>
+              <a:t>，</a:t>
+            </a:r>
+            <a:r>
+              <a:rPr lang="en-US" altLang="zh-CN" dirty="0"/>
+              <a:t>C</a:t>
+            </a:r>
+            <a:r>
+              <a:rPr lang="zh-CN" altLang="en-US" dirty="0"/>
+              <a:t>和</a:t>
+            </a:r>
+            <a:r>
+              <a:rPr lang="en-US" altLang="zh-CN" dirty="0"/>
+              <a:t>G</a:t>
+            </a:r>
+            <a:r>
+              <a:rPr lang="zh-CN" altLang="en-US" dirty="0"/>
+              <a:t>矩阵都是不变的</a:t>
+            </a:r>
+            <a:endParaRPr lang="en-US" altLang="zh-CN" dirty="0"/>
+          </a:p>
+          <a:p>
+            <a:r>
+              <a:rPr lang="zh-CN" altLang="en-US" dirty="0"/>
+              <a:t>因此就可以将</a:t>
+            </a:r>
+            <a:r>
+              <a:rPr lang="en-US" altLang="zh-CN" dirty="0"/>
+              <a:t>M</a:t>
+            </a:r>
+            <a:r>
+              <a:rPr lang="zh-CN" altLang="en-US" dirty="0"/>
+              <a:t>和</a:t>
+            </a:r>
+            <a:r>
+              <a:rPr lang="en-US" altLang="zh-CN" dirty="0"/>
+              <a:t>C</a:t>
+            </a:r>
+            <a:r>
+              <a:rPr lang="zh-CN" altLang="en-US" dirty="0"/>
+              <a:t>和</a:t>
+            </a:r>
+            <a:r>
+              <a:rPr lang="en-US" altLang="zh-CN" dirty="0"/>
+              <a:t>G</a:t>
+            </a:r>
+            <a:r>
+              <a:rPr lang="zh-CN" altLang="en-US" dirty="0"/>
+              <a:t>矩阵提取出来，换个参数就可以构建出</a:t>
+            </a:r>
+            <a:r>
+              <a:rPr lang="en-US" altLang="zh-CN" dirty="0" err="1"/>
+              <a:t>tau_a</a:t>
+            </a:r>
+            <a:r>
+              <a:rPr lang="zh-CN" altLang="en-US" dirty="0"/>
+              <a:t>的公式，得到</a:t>
+            </a:r>
+            <a:r>
+              <a:rPr lang="en-US" altLang="zh-CN" dirty="0" err="1"/>
+              <a:t>tau_a</a:t>
+            </a:r>
+            <a:endParaRPr lang="en-US" altLang="zh-CN" dirty="0"/>
+          </a:p>
+          <a:p>
+            <a:endParaRPr lang="en-US" altLang="zh-CN" dirty="0"/>
+          </a:p>
+          <a:p>
+            <a:endParaRPr lang="en-US" altLang="zh-CN" dirty="0"/>
+          </a:p>
+          <a:p>
+            <a:endParaRPr lang="en-US" altLang="zh-CN" dirty="0"/>
+          </a:p>
+        </p:txBody>
+      </p:sp>
+      <p:pic>
+        <p:nvPicPr>
+          <p:cNvPr id="32" name="图片 31">
+            <a:extLst>
+              <a:ext uri="{FF2B5EF4-FFF2-40B4-BE49-F238E27FC236}">
+                <a16:creationId xmlns:a16="http://schemas.microsoft.com/office/drawing/2014/main" id="{93F75B25-A531-287D-F384-3A763AF619C9}"/>
+              </a:ext>
+            </a:extLst>
+          </p:cNvPr>
+          <p:cNvPicPr>
+            <a:picLocks noChangeAspect="1"/>
+          </p:cNvPicPr>
+          <p:nvPr/>
+        </p:nvPicPr>
+        <p:blipFill>
+          <a:blip r:embed="rId5">
+            <a:extLst>
+              <a:ext uri="{28A0092B-C50C-407E-A947-70E740481C1C}">
+                <a14:useLocalDpi xmlns:a14="http://schemas.microsoft.com/office/drawing/2010/main" val="0"/>
+              </a:ext>
+            </a:extLst>
+          </a:blip>
+          <a:stretch>
+            <a:fillRect/>
+          </a:stretch>
+        </p:blipFill>
+        <p:spPr>
+          <a:xfrm>
+            <a:off x="7452323" y="1270354"/>
+            <a:ext cx="3439130" cy="283186"/>
+          </a:xfrm>
+          <a:prstGeom prst="rect">
+            <a:avLst/>
+          </a:prstGeom>
+        </p:spPr>
+      </p:pic>
+      <p:sp>
+        <p:nvSpPr>
+          <p:cNvPr id="33" name="文本框 32">
+            <a:extLst>
+              <a:ext uri="{FF2B5EF4-FFF2-40B4-BE49-F238E27FC236}">
+                <a16:creationId xmlns:a16="http://schemas.microsoft.com/office/drawing/2014/main" id="{6F433B21-1121-E7A9-891B-0890D4A4198D}"/>
+              </a:ext>
+            </a:extLst>
+          </p:cNvPr>
+          <p:cNvSpPr txBox="1"/>
+          <p:nvPr/>
+        </p:nvSpPr>
+        <p:spPr>
+          <a:xfrm>
+            <a:off x="5963120" y="1615438"/>
+            <a:ext cx="6228875" cy="646331"/>
+          </a:xfrm>
+          <a:prstGeom prst="rect">
+            <a:avLst/>
+          </a:prstGeom>
+          <a:noFill/>
+        </p:spPr>
+        <p:txBody>
+          <a:bodyPr wrap="square" rtlCol="0">
+            <a:spAutoFit/>
+          </a:bodyPr>
+          <a:lstStyle/>
+          <a:p>
+            <a:r>
+              <a:rPr lang="zh-CN" altLang="en-US" dirty="0"/>
+              <a:t>之后左边有</a:t>
+            </a:r>
+            <a:r>
+              <a:rPr lang="en-US" altLang="zh-CN" dirty="0" err="1"/>
+              <a:t>tau_a</a:t>
+            </a:r>
+            <a:r>
+              <a:rPr lang="zh-CN" altLang="en-US" dirty="0"/>
+              <a:t>，右边的</a:t>
+            </a:r>
+            <a:r>
+              <a:rPr lang="en-US" altLang="zh-CN" dirty="0"/>
+              <a:t>pi</a:t>
+            </a:r>
+            <a:r>
+              <a:rPr lang="zh-CN" altLang="en-US" dirty="0"/>
+              <a:t>已经求出，就可以直接求解得到</a:t>
+            </a:r>
+            <a:r>
+              <a:rPr lang="en-US" altLang="zh-CN" dirty="0"/>
+              <a:t>Ya</a:t>
+            </a:r>
+          </a:p>
+        </p:txBody>
+      </p:sp>
+      <p:sp>
+        <p:nvSpPr>
+          <p:cNvPr id="34" name="文本框 33">
+            <a:extLst>
+              <a:ext uri="{FF2B5EF4-FFF2-40B4-BE49-F238E27FC236}">
+                <a16:creationId xmlns:a16="http://schemas.microsoft.com/office/drawing/2014/main" id="{C0FB9F89-3CE0-5EC3-B6EA-245FF8C08487}"/>
+              </a:ext>
+            </a:extLst>
+          </p:cNvPr>
+          <p:cNvSpPr txBox="1"/>
+          <p:nvPr/>
+        </p:nvSpPr>
+        <p:spPr>
+          <a:xfrm>
+            <a:off x="5963125" y="2634950"/>
+            <a:ext cx="6228875" cy="369332"/>
+          </a:xfrm>
+          <a:prstGeom prst="rect">
+            <a:avLst/>
+          </a:prstGeom>
+          <a:noFill/>
+        </p:spPr>
+        <p:txBody>
+          <a:bodyPr wrap="square" rtlCol="0">
+            <a:spAutoFit/>
+          </a:bodyPr>
+          <a:lstStyle/>
+          <a:p>
+            <a:r>
+              <a:rPr lang="zh-CN" altLang="en-US" dirty="0"/>
+              <a:t>这样直接对</a:t>
+            </a:r>
+            <a:r>
+              <a:rPr lang="en-US" altLang="zh-CN" dirty="0"/>
+              <a:t>pi</a:t>
+            </a:r>
+            <a:r>
+              <a:rPr lang="zh-CN" altLang="en-US" dirty="0"/>
+              <a:t>求雅可比，就可以得到</a:t>
+            </a:r>
+            <a:r>
+              <a:rPr lang="en-US" altLang="zh-CN" dirty="0"/>
+              <a:t>Ya</a:t>
+            </a:r>
+            <a:r>
+              <a:rPr lang="zh-CN" altLang="en-US" dirty="0"/>
+              <a:t>了</a:t>
+            </a:r>
+            <a:endParaRPr lang="en-US" altLang="zh-CN" dirty="0"/>
+          </a:p>
+        </p:txBody>
+      </p:sp>
+      <p:pic>
+        <p:nvPicPr>
+          <p:cNvPr id="35" name="图片 34">
+            <a:extLst>
+              <a:ext uri="{FF2B5EF4-FFF2-40B4-BE49-F238E27FC236}">
+                <a16:creationId xmlns:a16="http://schemas.microsoft.com/office/drawing/2014/main" id="{B1FF1D2C-ECD2-FAA2-2883-10165459BA75}"/>
+              </a:ext>
+            </a:extLst>
+          </p:cNvPr>
+          <p:cNvPicPr>
+            <a:picLocks noChangeAspect="1"/>
+          </p:cNvPicPr>
+          <p:nvPr/>
+        </p:nvPicPr>
+        <p:blipFill>
+          <a:blip r:embed="rId6">
+            <a:extLst>
+              <a:ext uri="{28A0092B-C50C-407E-A947-70E740481C1C}">
+                <a14:useLocalDpi xmlns:a14="http://schemas.microsoft.com/office/drawing/2010/main" val="0"/>
+              </a:ext>
+            </a:extLst>
+          </a:blip>
+          <a:stretch>
+            <a:fillRect/>
+          </a:stretch>
+        </p:blipFill>
+        <p:spPr>
+          <a:xfrm>
+            <a:off x="8522817" y="2261769"/>
+            <a:ext cx="1298142" cy="312485"/>
+          </a:xfrm>
+          <a:prstGeom prst="rect">
+            <a:avLst/>
+          </a:prstGeom>
+        </p:spPr>
+      </p:pic>
+      <p:pic>
+        <p:nvPicPr>
+          <p:cNvPr id="36" name="图片 35">
+            <a:extLst>
+              <a:ext uri="{FF2B5EF4-FFF2-40B4-BE49-F238E27FC236}">
+                <a16:creationId xmlns:a16="http://schemas.microsoft.com/office/drawing/2014/main" id="{A0BD1E2C-B85A-BC6C-ED60-0928B931783D}"/>
+              </a:ext>
+            </a:extLst>
+          </p:cNvPr>
+          <p:cNvPicPr>
+            <a:picLocks noChangeAspect="1"/>
+          </p:cNvPicPr>
+          <p:nvPr/>
+        </p:nvPicPr>
+        <p:blipFill>
+          <a:blip r:embed="rId7"/>
+          <a:stretch>
+            <a:fillRect/>
+          </a:stretch>
+        </p:blipFill>
+        <p:spPr>
+          <a:xfrm>
+            <a:off x="6136344" y="3091287"/>
+            <a:ext cx="5675631" cy="2168621"/>
+          </a:xfrm>
+          <a:prstGeom prst="rect">
+            <a:avLst/>
+          </a:prstGeom>
+        </p:spPr>
+      </p:pic>
+      <p:sp>
+        <p:nvSpPr>
+          <p:cNvPr id="37" name="文本框 36">
+            <a:extLst>
+              <a:ext uri="{FF2B5EF4-FFF2-40B4-BE49-F238E27FC236}">
+                <a16:creationId xmlns:a16="http://schemas.microsoft.com/office/drawing/2014/main" id="{F2B7EBCE-3CD3-B4A6-FC66-3EED95410554}"/>
+              </a:ext>
+            </a:extLst>
+          </p:cNvPr>
+          <p:cNvSpPr txBox="1"/>
+          <p:nvPr/>
+        </p:nvSpPr>
+        <p:spPr>
+          <a:xfrm>
+            <a:off x="6136344" y="5427194"/>
+            <a:ext cx="5211426" cy="1200329"/>
+          </a:xfrm>
+          <a:prstGeom prst="rect">
+            <a:avLst/>
+          </a:prstGeom>
+          <a:noFill/>
+        </p:spPr>
+        <p:txBody>
+          <a:bodyPr wrap="square" rtlCol="0">
+            <a:spAutoFit/>
+          </a:bodyPr>
+          <a:lstStyle/>
+          <a:p>
+            <a:r>
+              <a:rPr lang="zh-CN" altLang="en-US" dirty="0"/>
+              <a:t>相关代码参见：</a:t>
+            </a:r>
+            <a:r>
+              <a:rPr lang="en-US" altLang="zh-CN" dirty="0" err="1"/>
+              <a:t>generate_Y_a.m</a:t>
+            </a:r>
+            <a:endParaRPr lang="en-US" altLang="zh-CN" dirty="0"/>
+          </a:p>
+          <a:p>
+            <a:r>
+              <a:rPr lang="zh-CN" altLang="en-US" dirty="0"/>
+              <a:t>前置代码为：</a:t>
+            </a:r>
+            <a:r>
+              <a:rPr lang="zh-CN" altLang="zh-CN" dirty="0"/>
+              <a:t>MATLAB\RNEA_SYM.m，MATLAB\Mat_out.m，</a:t>
+            </a:r>
+            <a:endParaRPr lang="en-US" altLang="zh-CN" dirty="0"/>
+          </a:p>
+          <a:p>
+            <a:r>
+              <a:rPr lang="zh-CN" altLang="zh-CN" dirty="0"/>
+              <a:t>MATLAB\add_friction.m</a:t>
+            </a:r>
+            <a:endParaRPr lang="zh-CN" altLang="en-US" dirty="0"/>
+          </a:p>
+        </p:txBody>
+      </p:sp>
     </p:spTree>
     <p:extLst>
       <p:ext uri="{BB962C8B-B14F-4D97-AF65-F5344CB8AC3E}">
@@ -3685,48 +4376,95 @@
           <a:chExt cx="0" cy="0"/>
         </a:xfrm>
       </p:grpSpPr>
-      <p:cxnSp>
-        <p:nvCxnSpPr>
-          <p:cNvPr id="4" name="直接连接符 3">
-            <a:extLst>
-              <a:ext uri="{FF2B5EF4-FFF2-40B4-BE49-F238E27FC236}">
-                <a16:creationId xmlns:a16="http://schemas.microsoft.com/office/drawing/2014/main" id="{35F9BCB3-2976-4229-FC55-BA5A7C2A3BF6}"/>
-              </a:ext>
-            </a:extLst>
-          </p:cNvPr>
-          <p:cNvCxnSpPr/>
+      <p:sp>
+        <p:nvSpPr>
+          <p:cNvPr id="4" name="文本框 3">
+            <a:extLst>
+              <a:ext uri="{FF2B5EF4-FFF2-40B4-BE49-F238E27FC236}">
+                <a16:creationId xmlns:a16="http://schemas.microsoft.com/office/drawing/2014/main" id="{5D164757-3299-52DE-B0CF-435E99794D0B}"/>
+              </a:ext>
+            </a:extLst>
+          </p:cNvPr>
+          <p:cNvSpPr txBox="1"/>
           <p:nvPr/>
-        </p:nvCxnSpPr>
-        <p:spPr>
-          <a:xfrm>
-            <a:off x="5933732" y="0"/>
-            <a:ext cx="0" cy="6858000"/>
-          </a:xfrm>
-          <a:prstGeom prst="line">
+        </p:nvSpPr>
+        <p:spPr>
+          <a:xfrm>
+            <a:off x="1" y="59206"/>
+            <a:ext cx="5164058" cy="2308324"/>
+          </a:xfrm>
+          <a:prstGeom prst="rect">
             <a:avLst/>
           </a:prstGeom>
-        </p:spPr>
-        <p:style>
-          <a:lnRef idx="2">
-            <a:schemeClr val="accent1"/>
-          </a:lnRef>
-          <a:fillRef idx="0">
-            <a:schemeClr val="accent1"/>
-          </a:fillRef>
-          <a:effectRef idx="1">
-            <a:schemeClr val="accent1"/>
-          </a:effectRef>
-          <a:fontRef idx="minor">
-            <a:schemeClr val="tx1"/>
-          </a:fontRef>
-        </p:style>
-      </p:cxnSp>
+          <a:noFill/>
+        </p:spPr>
+        <p:txBody>
+          <a:bodyPr wrap="square" rtlCol="0">
+            <a:spAutoFit/>
+          </a:bodyPr>
+          <a:lstStyle/>
+          <a:p>
+            <a:r>
+              <a:rPr lang="zh-CN" altLang="en-US" dirty="0"/>
+              <a:t>通过程序计算出来的</a:t>
+            </a:r>
+            <a:r>
+              <a:rPr lang="en-US" altLang="zh-CN" dirty="0" err="1"/>
+              <a:t>Y_a</a:t>
+            </a:r>
+            <a:r>
+              <a:rPr lang="zh-CN" altLang="en-US" dirty="0"/>
+              <a:t>值为：</a:t>
+            </a:r>
+            <a:endParaRPr lang="en-US" altLang="zh-CN" dirty="0"/>
+          </a:p>
+          <a:p>
+            <a:r>
+              <a:rPr lang="en-US" altLang="zh-CN" dirty="0" err="1"/>
+              <a:t>Y_a_reference</a:t>
+            </a:r>
+            <a:r>
+              <a:rPr lang="en-US" altLang="zh-CN" dirty="0"/>
+              <a:t> = </a:t>
+            </a:r>
+            <a:r>
+              <a:rPr lang="en-US" altLang="zh-CN" dirty="0" err="1"/>
+              <a:t>jacobian</a:t>
+            </a:r>
+            <a:r>
+              <a:rPr lang="en-US" altLang="zh-CN" dirty="0"/>
+              <a:t>(</a:t>
+            </a:r>
+            <a:r>
+              <a:rPr lang="en-US" altLang="zh-CN" dirty="0" err="1"/>
+              <a:t>tau_a_reference,pi_a</a:t>
+            </a:r>
+            <a:r>
+              <a:rPr lang="en-US" altLang="zh-CN" dirty="0"/>
+              <a:t>) =</a:t>
+            </a:r>
+          </a:p>
+          <a:p>
+            <a:r>
+              <a:rPr lang="en-US" altLang="zh-CN" dirty="0"/>
+              <a:t>[dq_1, ar_1, 2*ar_1*cos(q_2) + ar_2*cos(q_2) - dq_2*vr_1*sin(q_2) - vr_2*sin(q_2)*(dq_1 + dq_2), g*sin(q_1), ar_1 + ar_2, g*sin(q_1 + q_2),    0]</a:t>
+            </a:r>
+          </a:p>
+          <a:p>
+            <a:r>
+              <a:rPr lang="en-US" altLang="zh-CN" dirty="0"/>
+              <a:t>[   0,    0,                                                 ar_1*cos(q_2) + dq_1*vr_1*sin(q_2),          0, ar_1 + ar_2, g*sin(q_1 + q_2), dq_2]</a:t>
+            </a:r>
+            <a:endParaRPr lang="zh-CN" altLang="en-US" dirty="0"/>
+          </a:p>
+        </p:txBody>
+      </p:sp>
       <p:pic>
         <p:nvPicPr>
           <p:cNvPr id="5" name="图片 4">
             <a:extLst>
               <a:ext uri="{FF2B5EF4-FFF2-40B4-BE49-F238E27FC236}">
-                <a16:creationId xmlns:a16="http://schemas.microsoft.com/office/drawing/2014/main" id="{B611BF04-CFC0-A182-6672-57A4E3703E00}"/>
+                <a16:creationId xmlns:a16="http://schemas.microsoft.com/office/drawing/2014/main" id="{04D1D4B3-C266-50D1-0468-2D5C296163AA}"/>
               </a:ext>
             </a:extLst>
           </p:cNvPr>
@@ -3743,189 +4481,18 @@
         </p:blipFill>
         <p:spPr>
           <a:xfrm>
-            <a:off x="6025831" y="303853"/>
-            <a:ext cx="5902450" cy="2889558"/>
+            <a:off x="0" y="2452920"/>
+            <a:ext cx="12192001" cy="912770"/>
           </a:xfrm>
           <a:prstGeom prst="rect">
             <a:avLst/>
           </a:prstGeom>
         </p:spPr>
       </p:pic>
-      <p:pic>
-        <p:nvPicPr>
-          <p:cNvPr id="6" name="图片 5">
-            <a:extLst>
-              <a:ext uri="{FF2B5EF4-FFF2-40B4-BE49-F238E27FC236}">
-                <a16:creationId xmlns:a16="http://schemas.microsoft.com/office/drawing/2014/main" id="{354794C3-1FBB-5199-5E36-AF1B093B8E33}"/>
-              </a:ext>
-            </a:extLst>
-          </p:cNvPr>
-          <p:cNvPicPr>
-            <a:picLocks noChangeAspect="1"/>
-          </p:cNvPicPr>
-          <p:nvPr/>
-        </p:nvPicPr>
-        <p:blipFill>
-          <a:blip r:embed="rId3"/>
-          <a:stretch>
-            <a:fillRect/>
-          </a:stretch>
-        </p:blipFill>
-        <p:spPr>
-          <a:xfrm>
-            <a:off x="480225" y="303853"/>
-            <a:ext cx="4769588" cy="4460504"/>
-          </a:xfrm>
-          <a:prstGeom prst="rect">
-            <a:avLst/>
-          </a:prstGeom>
-        </p:spPr>
-      </p:pic>
-      <p:sp>
-        <p:nvSpPr>
-          <p:cNvPr id="7" name="文本框 6">
-            <a:extLst>
-              <a:ext uri="{FF2B5EF4-FFF2-40B4-BE49-F238E27FC236}">
-                <a16:creationId xmlns:a16="http://schemas.microsoft.com/office/drawing/2014/main" id="{72ACFCC9-B336-3D02-6AF1-525545390628}"/>
-              </a:ext>
-            </a:extLst>
-          </p:cNvPr>
-          <p:cNvSpPr txBox="1"/>
-          <p:nvPr/>
-        </p:nvSpPr>
-        <p:spPr>
-          <a:xfrm>
-            <a:off x="763096" y="4953548"/>
-            <a:ext cx="4012835" cy="646331"/>
-          </a:xfrm>
-          <a:prstGeom prst="rect">
-            <a:avLst/>
-          </a:prstGeom>
-          <a:noFill/>
-        </p:spPr>
-        <p:txBody>
-          <a:bodyPr wrap="square" rtlCol="0">
-            <a:spAutoFit/>
-          </a:bodyPr>
-          <a:lstStyle/>
-          <a:p>
-            <a:r>
-              <a:rPr lang="zh-CN" altLang="en-US" dirty="0"/>
-              <a:t>核心原因：将位置误差</a:t>
-            </a:r>
-            <a:r>
-              <a:rPr lang="en-US" altLang="zh-CN" dirty="0"/>
-              <a:t>e</a:t>
-            </a:r>
-            <a:r>
-              <a:rPr lang="zh-CN" altLang="en-US" dirty="0"/>
-              <a:t>和速度误差</a:t>
-            </a:r>
-            <a:r>
-              <a:rPr lang="en-US" altLang="zh-CN" dirty="0"/>
-              <a:t>de</a:t>
-            </a:r>
-            <a:r>
-              <a:rPr lang="zh-CN" altLang="en-US" dirty="0">
-                <a:solidFill>
-                  <a:srgbClr val="FF0000"/>
-                </a:solidFill>
-              </a:rPr>
-              <a:t>组合成一个变量</a:t>
-            </a:r>
-            <a:r>
-              <a:rPr lang="en-US" altLang="zh-CN" dirty="0">
-                <a:solidFill>
-                  <a:srgbClr val="FF0000"/>
-                </a:solidFill>
-              </a:rPr>
-              <a:t>s</a:t>
-            </a:r>
-            <a:endParaRPr lang="zh-CN" altLang="en-US" dirty="0">
-              <a:solidFill>
-                <a:srgbClr val="FF0000"/>
-              </a:solidFill>
-            </a:endParaRPr>
-          </a:p>
-        </p:txBody>
-      </p:sp>
-      <p:pic>
-        <p:nvPicPr>
-          <p:cNvPr id="8" name="图片 7">
-            <a:extLst>
-              <a:ext uri="{FF2B5EF4-FFF2-40B4-BE49-F238E27FC236}">
-                <a16:creationId xmlns:a16="http://schemas.microsoft.com/office/drawing/2014/main" id="{AEADC90D-643D-CC96-6F02-26D05B3FD7EB}"/>
-              </a:ext>
-            </a:extLst>
-          </p:cNvPr>
-          <p:cNvPicPr>
-            <a:picLocks noChangeAspect="1"/>
-          </p:cNvPicPr>
-          <p:nvPr/>
-        </p:nvPicPr>
-        <p:blipFill>
-          <a:blip r:embed="rId4"/>
-          <a:stretch>
-            <a:fillRect/>
-          </a:stretch>
-        </p:blipFill>
-        <p:spPr>
-          <a:xfrm>
-            <a:off x="6784542" y="3907578"/>
-            <a:ext cx="3754081" cy="2816733"/>
-          </a:xfrm>
-          <a:prstGeom prst="rect">
-            <a:avLst/>
-          </a:prstGeom>
-        </p:spPr>
-      </p:pic>
-      <p:sp>
-        <p:nvSpPr>
-          <p:cNvPr id="9" name="文本框 8">
-            <a:extLst>
-              <a:ext uri="{FF2B5EF4-FFF2-40B4-BE49-F238E27FC236}">
-                <a16:creationId xmlns:a16="http://schemas.microsoft.com/office/drawing/2014/main" id="{A3898B72-118A-CF4B-A366-75799CF1C751}"/>
-              </a:ext>
-            </a:extLst>
-          </p:cNvPr>
-          <p:cNvSpPr txBox="1"/>
-          <p:nvPr/>
-        </p:nvSpPr>
-        <p:spPr>
-          <a:xfrm>
-            <a:off x="6181229" y="3429000"/>
-            <a:ext cx="2795827" cy="369332"/>
-          </a:xfrm>
-          <a:prstGeom prst="rect">
-            <a:avLst/>
-          </a:prstGeom>
-          <a:noFill/>
-        </p:spPr>
-        <p:txBody>
-          <a:bodyPr wrap="square" rtlCol="0">
-            <a:spAutoFit/>
-          </a:bodyPr>
-          <a:lstStyle/>
-          <a:p>
-            <a:r>
-              <a:rPr lang="zh-CN" altLang="en-US" dirty="0"/>
-              <a:t>是否为同一个</a:t>
-            </a:r>
-            <a:r>
-              <a:rPr lang="en-US" altLang="zh-CN" dirty="0"/>
-              <a:t>lambda</a:t>
-            </a:r>
-            <a:r>
-              <a:rPr lang="zh-CN" altLang="en-US" dirty="0"/>
-              <a:t>：</a:t>
-            </a:r>
-          </a:p>
-        </p:txBody>
-      </p:sp>
     </p:spTree>
     <p:extLst>
       <p:ext uri="{BB962C8B-B14F-4D97-AF65-F5344CB8AC3E}">
-        <p14:creationId xmlns:p14="http://schemas.microsoft.com/office/powerpoint/2010/main" val="2027750585"/>
+        <p14:creationId xmlns:p14="http://schemas.microsoft.com/office/powerpoint/2010/main" val="3362385958"/>
       </p:ext>
     </p:extLst>
   </p:cSld>
@@ -3952,125 +4519,48 @@
           <a:chExt cx="0" cy="0"/>
         </a:xfrm>
       </p:grpSpPr>
-      <p:sp>
-        <p:nvSpPr>
-          <p:cNvPr id="4" name="文本框 3">
-            <a:extLst>
-              <a:ext uri="{FF2B5EF4-FFF2-40B4-BE49-F238E27FC236}">
-                <a16:creationId xmlns:a16="http://schemas.microsoft.com/office/drawing/2014/main" id="{E4D36002-45F0-3E98-DF9A-7DFF0B1EC645}"/>
-              </a:ext>
-            </a:extLst>
-          </p:cNvPr>
-          <p:cNvSpPr txBox="1"/>
+      <p:cxnSp>
+        <p:nvCxnSpPr>
+          <p:cNvPr id="4" name="直接连接符 3">
+            <a:extLst>
+              <a:ext uri="{FF2B5EF4-FFF2-40B4-BE49-F238E27FC236}">
+                <a16:creationId xmlns:a16="http://schemas.microsoft.com/office/drawing/2014/main" id="{35F9BCB3-2976-4229-FC55-BA5A7C2A3BF6}"/>
+              </a:ext>
+            </a:extLst>
+          </p:cNvPr>
+          <p:cNvCxnSpPr/>
           <p:nvPr/>
-        </p:nvSpPr>
-        <p:spPr>
-          <a:xfrm>
-            <a:off x="0" y="124990"/>
-            <a:ext cx="5696909" cy="369332"/>
-          </a:xfrm>
-          <a:prstGeom prst="rect">
+        </p:nvCxnSpPr>
+        <p:spPr>
+          <a:xfrm>
+            <a:off x="5933732" y="0"/>
+            <a:ext cx="0" cy="6858000"/>
+          </a:xfrm>
+          <a:prstGeom prst="line">
             <a:avLst/>
           </a:prstGeom>
-          <a:noFill/>
-        </p:spPr>
-        <p:txBody>
-          <a:bodyPr wrap="square" rtlCol="0">
-            <a:spAutoFit/>
-          </a:bodyPr>
-          <a:lstStyle/>
-          <a:p>
-            <a:r>
-              <a:rPr lang="zh-CN" altLang="en-US" dirty="0"/>
-              <a:t>实际控制律：</a:t>
-            </a:r>
-          </a:p>
-        </p:txBody>
-      </p:sp>
-      <p:sp>
-        <p:nvSpPr>
-          <p:cNvPr id="6" name="文本框 5">
-            <a:extLst>
-              <a:ext uri="{FF2B5EF4-FFF2-40B4-BE49-F238E27FC236}">
-                <a16:creationId xmlns:a16="http://schemas.microsoft.com/office/drawing/2014/main" id="{958C2B50-086E-8D8B-4F3A-D9C4C74D879E}"/>
-              </a:ext>
-            </a:extLst>
-          </p:cNvPr>
-          <p:cNvSpPr txBox="1"/>
-          <p:nvPr/>
-        </p:nvSpPr>
-        <p:spPr>
-          <a:xfrm>
-            <a:off x="92098" y="1324610"/>
-            <a:ext cx="5696909" cy="369332"/>
-          </a:xfrm>
-          <a:prstGeom prst="rect">
-            <a:avLst/>
-          </a:prstGeom>
-          <a:noFill/>
-        </p:spPr>
-        <p:txBody>
-          <a:bodyPr wrap="square" rtlCol="0">
-            <a:spAutoFit/>
-          </a:bodyPr>
-          <a:lstStyle/>
-          <a:p>
-            <a:r>
-              <a:rPr lang="en-US" altLang="zh-CN" dirty="0"/>
-              <a:t>Ks</a:t>
-            </a:r>
-            <a:r>
-              <a:rPr lang="zh-CN" altLang="en-US" dirty="0"/>
-              <a:t>为人为设计的反馈增益矩阵，通常要求是对称正定</a:t>
-            </a:r>
-          </a:p>
-        </p:txBody>
-      </p:sp>
-      <p:sp>
-        <p:nvSpPr>
-          <p:cNvPr id="7" name="文本框 6">
-            <a:extLst>
-              <a:ext uri="{FF2B5EF4-FFF2-40B4-BE49-F238E27FC236}">
-                <a16:creationId xmlns:a16="http://schemas.microsoft.com/office/drawing/2014/main" id="{194D5AFC-F0F5-7869-A969-2BD75D0BF658}"/>
-              </a:ext>
-            </a:extLst>
-          </p:cNvPr>
-          <p:cNvSpPr txBox="1"/>
-          <p:nvPr/>
-        </p:nvSpPr>
-        <p:spPr>
-          <a:xfrm>
-            <a:off x="92097" y="1785236"/>
-            <a:ext cx="5696909" cy="646331"/>
-          </a:xfrm>
-          <a:prstGeom prst="rect">
-            <a:avLst/>
-          </a:prstGeom>
-          <a:noFill/>
-        </p:spPr>
-        <p:txBody>
-          <a:bodyPr wrap="square" rtlCol="0">
-            <a:spAutoFit/>
-          </a:bodyPr>
-          <a:lstStyle/>
-          <a:p>
-            <a:r>
-              <a:rPr lang="en-US" altLang="zh-CN" dirty="0" err="1"/>
-              <a:t>Pi_hat</a:t>
-            </a:r>
-            <a:r>
-              <a:rPr lang="zh-CN" altLang="en-US" dirty="0"/>
-              <a:t>是动力学参数估计向量，用于参数辨识或自适应律更新，需要实时更新</a:t>
-            </a:r>
-          </a:p>
-        </p:txBody>
-      </p:sp>
+        </p:spPr>
+        <p:style>
+          <a:lnRef idx="2">
+            <a:schemeClr val="accent1"/>
+          </a:lnRef>
+          <a:fillRef idx="0">
+            <a:schemeClr val="accent1"/>
+          </a:fillRef>
+          <a:effectRef idx="1">
+            <a:schemeClr val="accent1"/>
+          </a:effectRef>
+          <a:fontRef idx="minor">
+            <a:schemeClr val="tx1"/>
+          </a:fontRef>
+        </p:style>
+      </p:cxnSp>
       <p:pic>
         <p:nvPicPr>
-          <p:cNvPr id="8" name="图片 7">
-            <a:extLst>
-              <a:ext uri="{FF2B5EF4-FFF2-40B4-BE49-F238E27FC236}">
-                <a16:creationId xmlns:a16="http://schemas.microsoft.com/office/drawing/2014/main" id="{8E7B7A15-2264-798B-682C-3D8363CEA6CD}"/>
+          <p:cNvPr id="5" name="图片 4">
+            <a:extLst>
+              <a:ext uri="{FF2B5EF4-FFF2-40B4-BE49-F238E27FC236}">
+                <a16:creationId xmlns:a16="http://schemas.microsoft.com/office/drawing/2014/main" id="{B611BF04-CFC0-A182-6672-57A4E3703E00}"/>
               </a:ext>
             </a:extLst>
           </p:cNvPr>
@@ -4087,8 +4577,8 @@
         </p:blipFill>
         <p:spPr>
           <a:xfrm>
-            <a:off x="864101" y="547516"/>
-            <a:ext cx="4152900" cy="685800"/>
+            <a:off x="6025831" y="303853"/>
+            <a:ext cx="5902450" cy="2889558"/>
           </a:xfrm>
           <a:prstGeom prst="rect">
             <a:avLst/>
@@ -4097,10 +4587,10 @@
       </p:pic>
       <p:pic>
         <p:nvPicPr>
-          <p:cNvPr id="9" name="图片 8">
-            <a:extLst>
-              <a:ext uri="{FF2B5EF4-FFF2-40B4-BE49-F238E27FC236}">
-                <a16:creationId xmlns:a16="http://schemas.microsoft.com/office/drawing/2014/main" id="{1AEA12AC-85BE-A58D-592E-1A4B0FFB01D8}"/>
+          <p:cNvPr id="6" name="图片 5">
+            <a:extLst>
+              <a:ext uri="{FF2B5EF4-FFF2-40B4-BE49-F238E27FC236}">
+                <a16:creationId xmlns:a16="http://schemas.microsoft.com/office/drawing/2014/main" id="{354794C3-1FBB-5199-5E36-AF1B093B8E33}"/>
               </a:ext>
             </a:extLst>
           </p:cNvPr>
@@ -4117,20 +4607,88 @@
         </p:blipFill>
         <p:spPr>
           <a:xfrm>
-            <a:off x="541143" y="2613894"/>
-            <a:ext cx="4278062" cy="2734360"/>
+            <a:off x="480225" y="303853"/>
+            <a:ext cx="4769588" cy="4460504"/>
           </a:xfrm>
           <a:prstGeom prst="rect">
             <a:avLst/>
           </a:prstGeom>
         </p:spPr>
       </p:pic>
+      <p:sp>
+        <p:nvSpPr>
+          <p:cNvPr id="7" name="文本框 6">
+            <a:extLst>
+              <a:ext uri="{FF2B5EF4-FFF2-40B4-BE49-F238E27FC236}">
+                <a16:creationId xmlns:a16="http://schemas.microsoft.com/office/drawing/2014/main" id="{72ACFCC9-B336-3D02-6AF1-525545390628}"/>
+              </a:ext>
+            </a:extLst>
+          </p:cNvPr>
+          <p:cNvSpPr txBox="1"/>
+          <p:nvPr/>
+        </p:nvSpPr>
+        <p:spPr>
+          <a:xfrm>
+            <a:off x="763096" y="4953548"/>
+            <a:ext cx="4012835" cy="646331"/>
+          </a:xfrm>
+          <a:prstGeom prst="rect">
+            <a:avLst/>
+          </a:prstGeom>
+          <a:noFill/>
+        </p:spPr>
+        <p:txBody>
+          <a:bodyPr wrap="square" rtlCol="0">
+            <a:spAutoFit/>
+          </a:bodyPr>
+          <a:lstStyle/>
+          <a:p>
+            <a:r>
+              <a:rPr lang="zh-CN" altLang="en-US" dirty="0"/>
+              <a:t>核心原因：将位置误差</a:t>
+            </a:r>
+            <a:r>
+              <a:rPr lang="en-US" altLang="zh-CN" dirty="0"/>
+              <a:t>e</a:t>
+            </a:r>
+            <a:r>
+              <a:rPr lang="zh-CN" altLang="en-US" dirty="0"/>
+              <a:t>和速度误差</a:t>
+            </a:r>
+            <a:r>
+              <a:rPr lang="en-US" altLang="zh-CN" dirty="0"/>
+              <a:t>de</a:t>
+            </a:r>
+            <a:r>
+              <a:rPr lang="zh-CN" altLang="en-US" dirty="0">
+                <a:solidFill>
+                  <a:srgbClr val="FF0000"/>
+                </a:solidFill>
+              </a:rPr>
+              <a:t>组合成一个变量</a:t>
+            </a:r>
+            <a:r>
+              <a:rPr lang="en-US" altLang="zh-CN" dirty="0">
+                <a:solidFill>
+                  <a:srgbClr val="FF0000"/>
+                </a:solidFill>
+              </a:rPr>
+              <a:t>s</a:t>
+            </a:r>
+            <a:endParaRPr lang="zh-CN" altLang="en-US" dirty="0">
+              <a:solidFill>
+                <a:srgbClr val="FF0000"/>
+              </a:solidFill>
+            </a:endParaRPr>
+          </a:p>
+        </p:txBody>
+      </p:sp>
       <p:pic>
         <p:nvPicPr>
-          <p:cNvPr id="10" name="图片 9">
-            <a:extLst>
-              <a:ext uri="{FF2B5EF4-FFF2-40B4-BE49-F238E27FC236}">
-                <a16:creationId xmlns:a16="http://schemas.microsoft.com/office/drawing/2014/main" id="{3C40BB1B-28CE-9683-C36E-82F88F3692AE}"/>
+          <p:cNvPr id="8" name="图片 7">
+            <a:extLst>
+              <a:ext uri="{FF2B5EF4-FFF2-40B4-BE49-F238E27FC236}">
+                <a16:creationId xmlns:a16="http://schemas.microsoft.com/office/drawing/2014/main" id="{AEADC90D-643D-CC96-6F02-26D05B3FD7EB}"/>
               </a:ext>
             </a:extLst>
           </p:cNvPr>
@@ -4147,18 +4705,561 @@
         </p:blipFill>
         <p:spPr>
           <a:xfrm>
-            <a:off x="6190291" y="964072"/>
-            <a:ext cx="5805376" cy="4929855"/>
+            <a:off x="6784542" y="3907578"/>
+            <a:ext cx="3754081" cy="2816733"/>
           </a:xfrm>
           <a:prstGeom prst="rect">
             <a:avLst/>
           </a:prstGeom>
         </p:spPr>
       </p:pic>
+      <p:sp>
+        <p:nvSpPr>
+          <p:cNvPr id="9" name="文本框 8">
+            <a:extLst>
+              <a:ext uri="{FF2B5EF4-FFF2-40B4-BE49-F238E27FC236}">
+                <a16:creationId xmlns:a16="http://schemas.microsoft.com/office/drawing/2014/main" id="{A3898B72-118A-CF4B-A366-75799CF1C751}"/>
+              </a:ext>
+            </a:extLst>
+          </p:cNvPr>
+          <p:cNvSpPr txBox="1"/>
+          <p:nvPr/>
+        </p:nvSpPr>
+        <p:spPr>
+          <a:xfrm>
+            <a:off x="6181229" y="3429000"/>
+            <a:ext cx="2795827" cy="369332"/>
+          </a:xfrm>
+          <a:prstGeom prst="rect">
+            <a:avLst/>
+          </a:prstGeom>
+          <a:noFill/>
+        </p:spPr>
+        <p:txBody>
+          <a:bodyPr wrap="square" rtlCol="0">
+            <a:spAutoFit/>
+          </a:bodyPr>
+          <a:lstStyle/>
+          <a:p>
+            <a:r>
+              <a:rPr lang="zh-CN" altLang="en-US" dirty="0"/>
+              <a:t>是否为同一个</a:t>
+            </a:r>
+            <a:r>
+              <a:rPr lang="en-US" altLang="zh-CN" dirty="0"/>
+              <a:t>lambda</a:t>
+            </a:r>
+            <a:r>
+              <a:rPr lang="zh-CN" altLang="en-US" dirty="0"/>
+              <a:t>：</a:t>
+            </a:r>
+          </a:p>
+        </p:txBody>
+      </p:sp>
+    </p:spTree>
+    <p:extLst>
+      <p:ext uri="{BB962C8B-B14F-4D97-AF65-F5344CB8AC3E}">
+        <p14:creationId xmlns:p14="http://schemas.microsoft.com/office/powerpoint/2010/main" val="2027750585"/>
+      </p:ext>
+    </p:extLst>
+  </p:cSld>
+  <p:clrMapOvr>
+    <a:masterClrMapping/>
+  </p:clrMapOvr>
+</p:sld>
+</file>
+
+<file path=ppt/slides/slide4.xml><?xml version="1.0" encoding="utf-8"?>
+<p:sld xmlns:a="http://schemas.openxmlformats.org/drawingml/2006/main" xmlns:r="http://schemas.openxmlformats.org/officeDocument/2006/relationships" xmlns:p="http://schemas.openxmlformats.org/presentationml/2006/main">
+  <p:cSld>
+    <p:spTree>
+      <p:nvGrpSpPr>
+        <p:cNvPr id="1" name=""/>
+        <p:cNvGrpSpPr/>
+        <p:nvPr/>
+      </p:nvGrpSpPr>
+      <p:grpSpPr>
+        <a:xfrm>
+          <a:off x="0" y="0"/>
+          <a:ext cx="0" cy="0"/>
+          <a:chOff x="0" y="0"/>
+          <a:chExt cx="0" cy="0"/>
+        </a:xfrm>
+      </p:grpSpPr>
+      <p:sp>
+        <p:nvSpPr>
+          <p:cNvPr id="4" name="文本框 3">
+            <a:extLst>
+              <a:ext uri="{FF2B5EF4-FFF2-40B4-BE49-F238E27FC236}">
+                <a16:creationId xmlns:a16="http://schemas.microsoft.com/office/drawing/2014/main" id="{E4D36002-45F0-3E98-DF9A-7DFF0B1EC645}"/>
+              </a:ext>
+            </a:extLst>
+          </p:cNvPr>
+          <p:cNvSpPr txBox="1"/>
+          <p:nvPr/>
+        </p:nvSpPr>
+        <p:spPr>
+          <a:xfrm>
+            <a:off x="0" y="124990"/>
+            <a:ext cx="5696909" cy="369332"/>
+          </a:xfrm>
+          <a:prstGeom prst="rect">
+            <a:avLst/>
+          </a:prstGeom>
+          <a:noFill/>
+        </p:spPr>
+        <p:txBody>
+          <a:bodyPr wrap="square" rtlCol="0">
+            <a:spAutoFit/>
+          </a:bodyPr>
+          <a:lstStyle/>
+          <a:p>
+            <a:r>
+              <a:rPr lang="zh-CN" altLang="en-US" dirty="0"/>
+              <a:t>实际控制律：</a:t>
+            </a:r>
+          </a:p>
+        </p:txBody>
+      </p:sp>
+      <p:sp>
+        <p:nvSpPr>
+          <p:cNvPr id="6" name="文本框 5">
+            <a:extLst>
+              <a:ext uri="{FF2B5EF4-FFF2-40B4-BE49-F238E27FC236}">
+                <a16:creationId xmlns:a16="http://schemas.microsoft.com/office/drawing/2014/main" id="{958C2B50-086E-8D8B-4F3A-D9C4C74D879E}"/>
+              </a:ext>
+            </a:extLst>
+          </p:cNvPr>
+          <p:cNvSpPr txBox="1"/>
+          <p:nvPr/>
+        </p:nvSpPr>
+        <p:spPr>
+          <a:xfrm>
+            <a:off x="92097" y="968437"/>
+            <a:ext cx="5696909" cy="369332"/>
+          </a:xfrm>
+          <a:prstGeom prst="rect">
+            <a:avLst/>
+          </a:prstGeom>
+          <a:noFill/>
+        </p:spPr>
+        <p:txBody>
+          <a:bodyPr wrap="square" rtlCol="0">
+            <a:spAutoFit/>
+          </a:bodyPr>
+          <a:lstStyle/>
+          <a:p>
+            <a:r>
+              <a:rPr lang="en-US" altLang="zh-CN" dirty="0"/>
+              <a:t>Ks</a:t>
+            </a:r>
+            <a:r>
+              <a:rPr lang="zh-CN" altLang="en-US" dirty="0"/>
+              <a:t>为人为设计的</a:t>
+            </a:r>
+            <a:r>
+              <a:rPr lang="zh-CN" altLang="en-US" dirty="0">
+                <a:solidFill>
+                  <a:srgbClr val="FF0000"/>
+                </a:solidFill>
+              </a:rPr>
+              <a:t>反馈增益矩阵</a:t>
+            </a:r>
+            <a:r>
+              <a:rPr lang="zh-CN" altLang="en-US" dirty="0"/>
+              <a:t>，通常要求是对称正定</a:t>
+            </a:r>
+          </a:p>
+        </p:txBody>
+      </p:sp>
+      <p:sp>
+        <p:nvSpPr>
+          <p:cNvPr id="7" name="文本框 6">
+            <a:extLst>
+              <a:ext uri="{FF2B5EF4-FFF2-40B4-BE49-F238E27FC236}">
+                <a16:creationId xmlns:a16="http://schemas.microsoft.com/office/drawing/2014/main" id="{194D5AFC-F0F5-7869-A969-2BD75D0BF658}"/>
+              </a:ext>
+            </a:extLst>
+          </p:cNvPr>
+          <p:cNvSpPr txBox="1"/>
+          <p:nvPr/>
+        </p:nvSpPr>
+        <p:spPr>
+          <a:xfrm>
+            <a:off x="92096" y="1363512"/>
+            <a:ext cx="5696909" cy="646331"/>
+          </a:xfrm>
+          <a:prstGeom prst="rect">
+            <a:avLst/>
+          </a:prstGeom>
+          <a:noFill/>
+        </p:spPr>
+        <p:txBody>
+          <a:bodyPr wrap="square" rtlCol="0">
+            <a:spAutoFit/>
+          </a:bodyPr>
+          <a:lstStyle/>
+          <a:p>
+            <a:r>
+              <a:rPr lang="en-US" altLang="zh-CN" dirty="0" err="1"/>
+              <a:t>Pi_hat</a:t>
+            </a:r>
+            <a:r>
+              <a:rPr lang="zh-CN" altLang="en-US" dirty="0"/>
+              <a:t>是</a:t>
+            </a:r>
+            <a:r>
+              <a:rPr lang="zh-CN" altLang="en-US" dirty="0">
+                <a:solidFill>
+                  <a:srgbClr val="FF0000"/>
+                </a:solidFill>
+              </a:rPr>
+              <a:t>动力学参数估计向量</a:t>
+            </a:r>
+            <a:r>
+              <a:rPr lang="zh-CN" altLang="en-US" dirty="0"/>
+              <a:t>，用于参数辨识或自适应律更新，需要实时更新</a:t>
+            </a:r>
+          </a:p>
+        </p:txBody>
+      </p:sp>
+      <p:pic>
+        <p:nvPicPr>
+          <p:cNvPr id="9" name="图片 8">
+            <a:extLst>
+              <a:ext uri="{FF2B5EF4-FFF2-40B4-BE49-F238E27FC236}">
+                <a16:creationId xmlns:a16="http://schemas.microsoft.com/office/drawing/2014/main" id="{1AEA12AC-85BE-A58D-592E-1A4B0FFB01D8}"/>
+              </a:ext>
+            </a:extLst>
+          </p:cNvPr>
+          <p:cNvPicPr>
+            <a:picLocks noChangeAspect="1"/>
+          </p:cNvPicPr>
+          <p:nvPr/>
+        </p:nvPicPr>
+        <p:blipFill>
+          <a:blip r:embed="rId2"/>
+          <a:stretch>
+            <a:fillRect/>
+          </a:stretch>
+        </p:blipFill>
+        <p:spPr>
+          <a:xfrm>
+            <a:off x="709423" y="2061819"/>
+            <a:ext cx="4278062" cy="2734360"/>
+          </a:xfrm>
+          <a:prstGeom prst="rect">
+            <a:avLst/>
+          </a:prstGeom>
+        </p:spPr>
+      </p:pic>
+      <p:pic>
+        <p:nvPicPr>
+          <p:cNvPr id="5" name="图片 4">
+            <a:extLst>
+              <a:ext uri="{FF2B5EF4-FFF2-40B4-BE49-F238E27FC236}">
+                <a16:creationId xmlns:a16="http://schemas.microsoft.com/office/drawing/2014/main" id="{4367C32C-ABBA-698C-993F-1186C1AE7877}"/>
+              </a:ext>
+            </a:extLst>
+          </p:cNvPr>
+          <p:cNvPicPr>
+            <a:picLocks noChangeAspect="1"/>
+          </p:cNvPicPr>
+          <p:nvPr/>
+        </p:nvPicPr>
+        <p:blipFill>
+          <a:blip r:embed="rId3">
+            <a:extLst>
+              <a:ext uri="{28A0092B-C50C-407E-A947-70E740481C1C}">
+                <a14:useLocalDpi xmlns:a14="http://schemas.microsoft.com/office/drawing/2010/main" val="0"/>
+              </a:ext>
+            </a:extLst>
+          </a:blip>
+          <a:stretch>
+            <a:fillRect/>
+          </a:stretch>
+        </p:blipFill>
+        <p:spPr>
+          <a:xfrm>
+            <a:off x="1752616" y="202960"/>
+            <a:ext cx="1635269" cy="249956"/>
+          </a:xfrm>
+          <a:prstGeom prst="rect">
+            <a:avLst/>
+          </a:prstGeom>
+        </p:spPr>
+      </p:pic>
+      <p:pic>
+        <p:nvPicPr>
+          <p:cNvPr id="13" name="图片 12">
+            <a:extLst>
+              <a:ext uri="{FF2B5EF4-FFF2-40B4-BE49-F238E27FC236}">
+                <a16:creationId xmlns:a16="http://schemas.microsoft.com/office/drawing/2014/main" id="{6C59381C-C34E-50AF-BAA2-76D35308909D}"/>
+              </a:ext>
+            </a:extLst>
+          </p:cNvPr>
+          <p:cNvPicPr>
+            <a:picLocks noChangeAspect="1"/>
+          </p:cNvPicPr>
+          <p:nvPr/>
+        </p:nvPicPr>
+        <p:blipFill>
+          <a:blip r:embed="rId4">
+            <a:extLst>
+              <a:ext uri="{28A0092B-C50C-407E-A947-70E740481C1C}">
+                <a14:useLocalDpi xmlns:a14="http://schemas.microsoft.com/office/drawing/2010/main" val="0"/>
+              </a:ext>
+            </a:extLst>
+          </a:blip>
+          <a:stretch>
+            <a:fillRect/>
+          </a:stretch>
+        </p:blipFill>
+        <p:spPr>
+          <a:xfrm>
+            <a:off x="1897341" y="544210"/>
+            <a:ext cx="1345820" cy="332768"/>
+          </a:xfrm>
+          <a:prstGeom prst="rect">
+            <a:avLst/>
+          </a:prstGeom>
+        </p:spPr>
+      </p:pic>
+      <p:sp>
+        <p:nvSpPr>
+          <p:cNvPr id="14" name="文本框 13">
+            <a:extLst>
+              <a:ext uri="{FF2B5EF4-FFF2-40B4-BE49-F238E27FC236}">
+                <a16:creationId xmlns:a16="http://schemas.microsoft.com/office/drawing/2014/main" id="{E0463466-6769-3E7F-9342-51FC451D3A37}"/>
+              </a:ext>
+            </a:extLst>
+          </p:cNvPr>
+          <p:cNvSpPr txBox="1"/>
+          <p:nvPr/>
+        </p:nvSpPr>
+        <p:spPr>
+          <a:xfrm>
+            <a:off x="6096000" y="44403"/>
+            <a:ext cx="2823442" cy="646331"/>
+          </a:xfrm>
+          <a:prstGeom prst="rect">
+            <a:avLst/>
+          </a:prstGeom>
+          <a:noFill/>
+        </p:spPr>
+        <p:txBody>
+          <a:bodyPr wrap="square" rtlCol="0">
+            <a:spAutoFit/>
+          </a:bodyPr>
+          <a:lstStyle/>
+          <a:p>
+            <a:r>
+              <a:rPr lang="zh-CN" altLang="en-US" dirty="0"/>
+              <a:t>为什么不使用期望速度：</a:t>
+            </a:r>
+            <a:endParaRPr lang="en-US" altLang="zh-CN" dirty="0"/>
+          </a:p>
+          <a:p>
+            <a:endParaRPr lang="zh-CN" altLang="en-US" dirty="0"/>
+          </a:p>
+        </p:txBody>
+      </p:sp>
+      <p:pic>
+        <p:nvPicPr>
+          <p:cNvPr id="15" name="图片 14">
+            <a:extLst>
+              <a:ext uri="{FF2B5EF4-FFF2-40B4-BE49-F238E27FC236}">
+                <a16:creationId xmlns:a16="http://schemas.microsoft.com/office/drawing/2014/main" id="{3F24AE09-C787-9191-85F4-68CE43E0DA58}"/>
+              </a:ext>
+            </a:extLst>
+          </p:cNvPr>
+          <p:cNvPicPr>
+            <a:picLocks noChangeAspect="1"/>
+          </p:cNvPicPr>
+          <p:nvPr/>
+        </p:nvPicPr>
+        <p:blipFill>
+          <a:blip r:embed="rId5"/>
+          <a:stretch>
+            <a:fillRect/>
+          </a:stretch>
+        </p:blipFill>
+        <p:spPr>
+          <a:xfrm>
+            <a:off x="6547783" y="554423"/>
+            <a:ext cx="4874779" cy="5749153"/>
+          </a:xfrm>
+          <a:prstGeom prst="rect">
+            <a:avLst/>
+          </a:prstGeom>
+        </p:spPr>
+      </p:pic>
+      <p:cxnSp>
+        <p:nvCxnSpPr>
+          <p:cNvPr id="17" name="直接连接符 16">
+            <a:extLst>
+              <a:ext uri="{FF2B5EF4-FFF2-40B4-BE49-F238E27FC236}">
+                <a16:creationId xmlns:a16="http://schemas.microsoft.com/office/drawing/2014/main" id="{DA890749-116D-E33F-65AC-E4328BEBEB45}"/>
+              </a:ext>
+            </a:extLst>
+          </p:cNvPr>
+          <p:cNvCxnSpPr/>
+          <p:nvPr/>
+        </p:nvCxnSpPr>
+        <p:spPr>
+          <a:xfrm>
+            <a:off x="5789005" y="0"/>
+            <a:ext cx="0" cy="6858000"/>
+          </a:xfrm>
+          <a:prstGeom prst="line">
+            <a:avLst/>
+          </a:prstGeom>
+        </p:spPr>
+        <p:style>
+          <a:lnRef idx="2">
+            <a:schemeClr val="accent1"/>
+          </a:lnRef>
+          <a:fillRef idx="0">
+            <a:schemeClr val="accent1"/>
+          </a:fillRef>
+          <a:effectRef idx="1">
+            <a:schemeClr val="accent1"/>
+          </a:effectRef>
+          <a:fontRef idx="minor">
+            <a:schemeClr val="tx1"/>
+          </a:fontRef>
+        </p:style>
+      </p:cxnSp>
     </p:spTree>
     <p:extLst>
       <p:ext uri="{BB962C8B-B14F-4D97-AF65-F5344CB8AC3E}">
         <p14:creationId xmlns:p14="http://schemas.microsoft.com/office/powerpoint/2010/main" val="2733790368"/>
+      </p:ext>
+    </p:extLst>
+  </p:cSld>
+  <p:clrMapOvr>
+    <a:masterClrMapping/>
+  </p:clrMapOvr>
+</p:sld>
+</file>
+
+<file path=ppt/slides/slide5.xml><?xml version="1.0" encoding="utf-8"?>
+<p:sld xmlns:a="http://schemas.openxmlformats.org/drawingml/2006/main" xmlns:r="http://schemas.openxmlformats.org/officeDocument/2006/relationships" xmlns:p="http://schemas.openxmlformats.org/presentationml/2006/main">
+  <p:cSld>
+    <p:spTree>
+      <p:nvGrpSpPr>
+        <p:cNvPr id="1" name=""/>
+        <p:cNvGrpSpPr/>
+        <p:nvPr/>
+      </p:nvGrpSpPr>
+      <p:grpSpPr>
+        <a:xfrm>
+          <a:off x="0" y="0"/>
+          <a:ext cx="0" cy="0"/>
+          <a:chOff x="0" y="0"/>
+          <a:chExt cx="0" cy="0"/>
+        </a:xfrm>
+      </p:grpSpPr>
+      <p:pic>
+        <p:nvPicPr>
+          <p:cNvPr id="4" name="图片 3">
+            <a:extLst>
+              <a:ext uri="{FF2B5EF4-FFF2-40B4-BE49-F238E27FC236}">
+                <a16:creationId xmlns:a16="http://schemas.microsoft.com/office/drawing/2014/main" id="{DAF27DC4-4176-633E-D534-3B340CC78E1A}"/>
+              </a:ext>
+            </a:extLst>
+          </p:cNvPr>
+          <p:cNvPicPr>
+            <a:picLocks noChangeAspect="1"/>
+          </p:cNvPicPr>
+          <p:nvPr/>
+        </p:nvPicPr>
+        <p:blipFill>
+          <a:blip r:embed="rId2"/>
+          <a:stretch>
+            <a:fillRect/>
+          </a:stretch>
+        </p:blipFill>
+        <p:spPr>
+          <a:xfrm>
+            <a:off x="151304" y="804519"/>
+            <a:ext cx="6615199" cy="5248962"/>
+          </a:xfrm>
+          <a:prstGeom prst="rect">
+            <a:avLst/>
+          </a:prstGeom>
+        </p:spPr>
+      </p:pic>
+      <p:pic>
+        <p:nvPicPr>
+          <p:cNvPr id="5" name="图片 4">
+            <a:extLst>
+              <a:ext uri="{FF2B5EF4-FFF2-40B4-BE49-F238E27FC236}">
+                <a16:creationId xmlns:a16="http://schemas.microsoft.com/office/drawing/2014/main" id="{6AD7F2A7-C134-90B8-9BFA-E0E6CB6CF18E}"/>
+              </a:ext>
+            </a:extLst>
+          </p:cNvPr>
+          <p:cNvPicPr>
+            <a:picLocks noChangeAspect="1"/>
+          </p:cNvPicPr>
+          <p:nvPr/>
+        </p:nvPicPr>
+        <p:blipFill>
+          <a:blip r:embed="rId3"/>
+          <a:stretch>
+            <a:fillRect/>
+          </a:stretch>
+        </p:blipFill>
+        <p:spPr>
+          <a:xfrm>
+            <a:off x="6376969" y="1341997"/>
+            <a:ext cx="5815031" cy="4174006"/>
+          </a:xfrm>
+          <a:prstGeom prst="rect">
+            <a:avLst/>
+          </a:prstGeom>
+        </p:spPr>
+      </p:pic>
+      <p:sp>
+        <p:nvSpPr>
+          <p:cNvPr id="6" name="文本框 5">
+            <a:extLst>
+              <a:ext uri="{FF2B5EF4-FFF2-40B4-BE49-F238E27FC236}">
+                <a16:creationId xmlns:a16="http://schemas.microsoft.com/office/drawing/2014/main" id="{ADCE9E06-7BBA-99C0-1510-341AAE287EE5}"/>
+              </a:ext>
+            </a:extLst>
+          </p:cNvPr>
+          <p:cNvSpPr txBox="1"/>
+          <p:nvPr/>
+        </p:nvSpPr>
+        <p:spPr>
+          <a:xfrm>
+            <a:off x="2662914" y="6177134"/>
+            <a:ext cx="1591977" cy="369332"/>
+          </a:xfrm>
+          <a:prstGeom prst="rect">
+            <a:avLst/>
+          </a:prstGeom>
+          <a:noFill/>
+        </p:spPr>
+        <p:txBody>
+          <a:bodyPr wrap="square" rtlCol="0">
+            <a:spAutoFit/>
+          </a:bodyPr>
+          <a:lstStyle/>
+          <a:p>
+            <a:pPr algn="ctr"/>
+            <a:r>
+              <a:rPr lang="zh-CN" altLang="en-US" dirty="0"/>
+              <a:t>参数基本收敛</a:t>
+            </a:r>
+          </a:p>
+        </p:txBody>
+      </p:sp>
+    </p:spTree>
+    <p:extLst>
+      <p:ext uri="{BB962C8B-B14F-4D97-AF65-F5344CB8AC3E}">
+        <p14:creationId xmlns:p14="http://schemas.microsoft.com/office/powerpoint/2010/main" val="567388936"/>
       </p:ext>
     </p:extLst>
   </p:cSld>

--- a/相关说明文档/普通AC构建.pptx
+++ b/相关说明文档/普通AC构建.pptx
@@ -10,6 +10,7 @@
     <p:sldId id="259" r:id="rId4"/>
     <p:sldId id="260" r:id="rId5"/>
     <p:sldId id="261" r:id="rId6"/>
+    <p:sldId id="263" r:id="rId7"/>
   </p:sldIdLst>
   <p:sldSz cx="12192000" cy="6858000"/>
   <p:notesSz cx="6858000" cy="9144000"/>
@@ -128,6 +129,11 @@
             <p14:sldId id="261"/>
           </p14:sldIdLst>
         </p14:section>
+        <p14:section name="控制律推导" id="{FF42D9A9-7EAB-49AB-AE9A-B2BC2DAE6A5E}">
+          <p14:sldIdLst>
+            <p14:sldId id="263"/>
+          </p14:sldIdLst>
+        </p14:section>
       </p14:sectionLst>
     </p:ext>
     <p:ext uri="{EFAFB233-063F-42B5-8137-9DF3F51BA10A}">
@@ -284,7 +290,7 @@
           <a:p>
             <a:fld id="{EF4FF0CC-3570-4ECA-B82E-A087111D5163}" type="datetimeFigureOut">
               <a:rPr lang="zh-CN" altLang="en-US" smtClean="0"/>
-              <a:t>2026/10/14</a:t>
+              <a:t>2026/10/15</a:t>
             </a:fld>
             <a:endParaRPr lang="zh-CN" altLang="en-US"/>
           </a:p>
@@ -482,7 +488,7 @@
           <a:p>
             <a:fld id="{EF4FF0CC-3570-4ECA-B82E-A087111D5163}" type="datetimeFigureOut">
               <a:rPr lang="zh-CN" altLang="en-US" smtClean="0"/>
-              <a:t>2026/10/14</a:t>
+              <a:t>2026/10/15</a:t>
             </a:fld>
             <a:endParaRPr lang="zh-CN" altLang="en-US"/>
           </a:p>
@@ -690,7 +696,7 @@
           <a:p>
             <a:fld id="{EF4FF0CC-3570-4ECA-B82E-A087111D5163}" type="datetimeFigureOut">
               <a:rPr lang="zh-CN" altLang="en-US" smtClean="0"/>
-              <a:t>2026/10/14</a:t>
+              <a:t>2026/10/15</a:t>
             </a:fld>
             <a:endParaRPr lang="zh-CN" altLang="en-US"/>
           </a:p>
@@ -888,7 +894,7 @@
           <a:p>
             <a:fld id="{EF4FF0CC-3570-4ECA-B82E-A087111D5163}" type="datetimeFigureOut">
               <a:rPr lang="zh-CN" altLang="en-US" smtClean="0"/>
-              <a:t>2026/10/14</a:t>
+              <a:t>2026/10/15</a:t>
             </a:fld>
             <a:endParaRPr lang="zh-CN" altLang="en-US"/>
           </a:p>
@@ -1163,7 +1169,7 @@
           <a:p>
             <a:fld id="{EF4FF0CC-3570-4ECA-B82E-A087111D5163}" type="datetimeFigureOut">
               <a:rPr lang="zh-CN" altLang="en-US" smtClean="0"/>
-              <a:t>2026/10/14</a:t>
+              <a:t>2026/10/15</a:t>
             </a:fld>
             <a:endParaRPr lang="zh-CN" altLang="en-US"/>
           </a:p>
@@ -1428,7 +1434,7 @@
           <a:p>
             <a:fld id="{EF4FF0CC-3570-4ECA-B82E-A087111D5163}" type="datetimeFigureOut">
               <a:rPr lang="zh-CN" altLang="en-US" smtClean="0"/>
-              <a:t>2026/10/14</a:t>
+              <a:t>2026/10/15</a:t>
             </a:fld>
             <a:endParaRPr lang="zh-CN" altLang="en-US"/>
           </a:p>
@@ -1840,7 +1846,7 @@
           <a:p>
             <a:fld id="{EF4FF0CC-3570-4ECA-B82E-A087111D5163}" type="datetimeFigureOut">
               <a:rPr lang="zh-CN" altLang="en-US" smtClean="0"/>
-              <a:t>2026/10/14</a:t>
+              <a:t>2026/10/15</a:t>
             </a:fld>
             <a:endParaRPr lang="zh-CN" altLang="en-US"/>
           </a:p>
@@ -1981,7 +1987,7 @@
           <a:p>
             <a:fld id="{EF4FF0CC-3570-4ECA-B82E-A087111D5163}" type="datetimeFigureOut">
               <a:rPr lang="zh-CN" altLang="en-US" smtClean="0"/>
-              <a:t>2026/10/14</a:t>
+              <a:t>2026/10/15</a:t>
             </a:fld>
             <a:endParaRPr lang="zh-CN" altLang="en-US"/>
           </a:p>
@@ -2094,7 +2100,7 @@
           <a:p>
             <a:fld id="{EF4FF0CC-3570-4ECA-B82E-A087111D5163}" type="datetimeFigureOut">
               <a:rPr lang="zh-CN" altLang="en-US" smtClean="0"/>
-              <a:t>2026/10/14</a:t>
+              <a:t>2026/10/15</a:t>
             </a:fld>
             <a:endParaRPr lang="zh-CN" altLang="en-US"/>
           </a:p>
@@ -2405,7 +2411,7 @@
           <a:p>
             <a:fld id="{EF4FF0CC-3570-4ECA-B82E-A087111D5163}" type="datetimeFigureOut">
               <a:rPr lang="zh-CN" altLang="en-US" smtClean="0"/>
-              <a:t>2026/10/14</a:t>
+              <a:t>2026/10/15</a:t>
             </a:fld>
             <a:endParaRPr lang="zh-CN" altLang="en-US"/>
           </a:p>
@@ -2693,7 +2699,7 @@
           <a:p>
             <a:fld id="{EF4FF0CC-3570-4ECA-B82E-A087111D5163}" type="datetimeFigureOut">
               <a:rPr lang="zh-CN" altLang="en-US" smtClean="0"/>
-              <a:t>2026/10/14</a:t>
+              <a:t>2026/10/15</a:t>
             </a:fld>
             <a:endParaRPr lang="zh-CN" altLang="en-US"/>
           </a:p>
@@ -2934,7 +2940,7 @@
           <a:p>
             <a:fld id="{EF4FF0CC-3570-4ECA-B82E-A087111D5163}" type="datetimeFigureOut">
               <a:rPr lang="zh-CN" altLang="en-US" smtClean="0"/>
-              <a:t>2026/10/14</a:t>
+              <a:t>2026/10/15</a:t>
             </a:fld>
             <a:endParaRPr lang="zh-CN" altLang="en-US"/>
           </a:p>
@@ -4167,6 +4173,11 @@
               <a:rPr lang="en-US" altLang="zh-CN" dirty="0"/>
               <a:t>Ya</a:t>
             </a:r>
+            <a:r>
+              <a:rPr lang="zh-CN" altLang="en-US" dirty="0"/>
+              <a:t>（对独立参数线性的符号求雅可比）</a:t>
+            </a:r>
+            <a:endParaRPr lang="en-US" altLang="zh-CN" dirty="0"/>
           </a:p>
         </p:txBody>
       </p:sp>
@@ -4390,8 +4401,8 @@
         </p:nvSpPr>
         <p:spPr>
           <a:xfrm>
-            <a:off x="1" y="59206"/>
-            <a:ext cx="5164058" cy="2308324"/>
+            <a:off x="0" y="59206"/>
+            <a:ext cx="12191999" cy="1477328"/>
           </a:xfrm>
           <a:prstGeom prst="rect">
             <a:avLst/>
@@ -4481,7 +4492,7 @@
         </p:blipFill>
         <p:spPr>
           <a:xfrm>
-            <a:off x="0" y="2452920"/>
+            <a:off x="0" y="1742451"/>
             <a:ext cx="12192001" cy="912770"/>
           </a:xfrm>
           <a:prstGeom prst="rect">
@@ -4629,7 +4640,7 @@
         </p:nvSpPr>
         <p:spPr>
           <a:xfrm>
-            <a:off x="763096" y="4953548"/>
+            <a:off x="858601" y="5716644"/>
             <a:ext cx="4012835" cy="646331"/>
           </a:xfrm>
           <a:prstGeom prst="rect">
@@ -4945,7 +4956,7 @@
         </p:blipFill>
         <p:spPr>
           <a:xfrm>
-            <a:off x="709423" y="2061819"/>
+            <a:off x="801520" y="3579430"/>
             <a:ext cx="4278062" cy="2734360"/>
           </a:xfrm>
           <a:prstGeom prst="rect">
@@ -5130,6 +5141,41 @@
           </a:fontRef>
         </p:style>
       </p:cxnSp>
+      <p:sp>
+        <p:nvSpPr>
+          <p:cNvPr id="2" name="文本框 1">
+            <a:extLst>
+              <a:ext uri="{FF2B5EF4-FFF2-40B4-BE49-F238E27FC236}">
+                <a16:creationId xmlns:a16="http://schemas.microsoft.com/office/drawing/2014/main" id="{BED5EC95-E066-1ECF-ABF0-7240E7989D48}"/>
+              </a:ext>
+            </a:extLst>
+          </p:cNvPr>
+          <p:cNvSpPr txBox="1"/>
+          <p:nvPr/>
+        </p:nvSpPr>
+        <p:spPr>
+          <a:xfrm>
+            <a:off x="46048" y="2063909"/>
+            <a:ext cx="5696909" cy="369332"/>
+          </a:xfrm>
+          <a:prstGeom prst="rect">
+            <a:avLst/>
+          </a:prstGeom>
+          <a:noFill/>
+        </p:spPr>
+        <p:txBody>
+          <a:bodyPr wrap="square" rtlCol="0">
+            <a:spAutoFit/>
+          </a:bodyPr>
+          <a:lstStyle/>
+          <a:p>
+            <a:r>
+              <a:rPr lang="zh-CN" altLang="en-US" dirty="0"/>
+              <a:t>实际控制律的左边为动力学补偿，右边减去误差反馈</a:t>
+            </a:r>
+          </a:p>
+        </p:txBody>
+      </p:sp>
     </p:spTree>
     <p:extLst>
       <p:ext uri="{BB962C8B-B14F-4D97-AF65-F5344CB8AC3E}">
@@ -5260,6 +5306,36 @@
     <p:extLst>
       <p:ext uri="{BB962C8B-B14F-4D97-AF65-F5344CB8AC3E}">
         <p14:creationId xmlns:p14="http://schemas.microsoft.com/office/powerpoint/2010/main" val="567388936"/>
+      </p:ext>
+    </p:extLst>
+  </p:cSld>
+  <p:clrMapOvr>
+    <a:masterClrMapping/>
+  </p:clrMapOvr>
+</p:sld>
+</file>
+
+<file path=ppt/slides/slide6.xml><?xml version="1.0" encoding="utf-8"?>
+<p:sld xmlns:a="http://schemas.openxmlformats.org/drawingml/2006/main" xmlns:r="http://schemas.openxmlformats.org/officeDocument/2006/relationships" xmlns:p="http://schemas.openxmlformats.org/presentationml/2006/main">
+  <p:cSld>
+    <p:spTree>
+      <p:nvGrpSpPr>
+        <p:cNvPr id="1" name=""/>
+        <p:cNvGrpSpPr/>
+        <p:nvPr/>
+      </p:nvGrpSpPr>
+      <p:grpSpPr>
+        <a:xfrm>
+          <a:off x="0" y="0"/>
+          <a:ext cx="0" cy="0"/>
+          <a:chOff x="0" y="0"/>
+          <a:chExt cx="0" cy="0"/>
+        </a:xfrm>
+      </p:grpSpPr>
+    </p:spTree>
+    <p:extLst>
+      <p:ext uri="{BB962C8B-B14F-4D97-AF65-F5344CB8AC3E}">
+        <p14:creationId xmlns:p14="http://schemas.microsoft.com/office/powerpoint/2010/main" val="2245993090"/>
       </p:ext>
     </p:extLst>
   </p:cSld>
